--- a/yocto_training_all_session_decks/session_decks/D3S4_Bootloader.pptx
+++ b/yocto_training_all_session_decks/session_decks/D3S4_Bootloader.pptx
@@ -5,25 +5,25 @@
     <p:sldMasterId id="2147483648" r:id="rId1"/>
   </p:sldMasterIdLst>
   <p:notesMasterIdLst>
-    <p:notesMasterId r:id="rId8"/>
+    <p:notesMasterId r:id="rId10"/>
   </p:notesMasterIdLst>
   <p:handoutMasterIdLst>
-    <p:handoutMasterId r:id="rId9"/>
+    <p:handoutMasterId r:id="rId11"/>
   </p:handoutMasterIdLst>
   <p:sldIdLst>
-    <p:sldId id="1007" r:id="rId18"/>
-    <p:sldId id="1008" r:id="rId19"/>
-    <p:sldId id="1009" r:id="rId20"/>
-    <p:sldId id="1010" r:id="rId21"/>
-    <p:sldId id="1011" r:id="rId22"/>
-    <p:sldId id="1012" r:id="rId23"/>
-    <p:sldId id="1013" r:id="rId24"/>
-    <p:sldId id="1014" r:id="rId25"/>
+    <p:sldId id="1007" r:id="rId2"/>
+    <p:sldId id="1008" r:id="rId3"/>
+    <p:sldId id="1009" r:id="rId4"/>
+    <p:sldId id="1010" r:id="rId5"/>
+    <p:sldId id="1011" r:id="rId6"/>
+    <p:sldId id="1012" r:id="rId7"/>
+    <p:sldId id="1013" r:id="rId8"/>
+    <p:sldId id="1014" r:id="rId9"/>
   </p:sldIdLst>
   <p:sldSz cx="12192000" cy="6858000"/>
   <p:notesSz cx="6858000" cy="9144000"/>
   <p:custDataLst>
-    <p:tags r:id="rId10"/>
+    <p:tags r:id="rId12"/>
   </p:custDataLst>
   <p:defaultTextStyle>
     <a:defPPr>
@@ -2929,7 +2929,7 @@
           <a:p>
             <a:fld id="{0CEC647C-F50C-4F78-AA33-D7AA6CDA18EE}" type="datetimeFigureOut">
               <a:rPr lang="en-US" smtClean="0"/>
-              <a:t>7/13/2025</a:t>
+              <a:t>6/11/2026</a:t>
             </a:fld>
             <a:endParaRPr lang="en-US"/>
           </a:p>
@@ -3094,7 +3094,7 @@
           <a:p>
             <a:fld id="{3A83341F-E62C-483B-84B4-966F8BE46097}" type="datetimeFigureOut">
               <a:rPr lang="en-US" smtClean="0"/>
-              <a:t>7/13/2025</a:t>
+              <a:t>6/11/2026</a:t>
             </a:fld>
             <a:endParaRPr lang="en-US"/>
           </a:p>
@@ -5178,8 +5178,8 @@
 </p:sldMaster>
 </file>
 
-<file path=ppt/slides/slide10.xml><?xml version="1.0" encoding="utf-8"?>
-<p:sld xmlns:a="http://schemas.openxmlformats.org/drawingml/2006/main" xmlns:p="http://schemas.openxmlformats.org/presentationml/2006/main" xmlns:r="http://schemas.openxmlformats.org/officeDocument/2006/relationships">
+<file path=ppt/slides/slide1.xml><?xml version="1.0" encoding="utf-8"?>
+<p:sld xmlns:a="http://schemas.openxmlformats.org/drawingml/2006/main" xmlns:r="http://schemas.openxmlformats.org/officeDocument/2006/relationships" xmlns:p="http://schemas.openxmlformats.org/presentationml/2006/main">
   <p:cSld>
     <p:spTree>
       <p:nvGrpSpPr>
@@ -5187,7 +5187,93 @@
         <p:cNvGrpSpPr/>
         <p:nvPr/>
       </p:nvGrpSpPr>
-      <p:grpSpPr/>
+      <p:grpSpPr>
+        <a:xfrm>
+          <a:off x="0" y="0"/>
+          <a:ext cx="0" cy="0"/>
+          <a:chOff x="0" y="0"/>
+          <a:chExt cx="0" cy="0"/>
+        </a:xfrm>
+      </p:grpSpPr>
+      <p:sp>
+        <p:nvSpPr>
+          <p:cNvPr id="2" name="Title 1"/>
+          <p:cNvSpPr>
+            <a:spLocks noGrp="1"/>
+          </p:cNvSpPr>
+          <p:nvPr>
+            <p:ph type="ctrTitle"/>
+          </p:nvPr>
+        </p:nvSpPr>
+        <p:spPr/>
+        <p:txBody>
+          <a:bodyPr/>
+          <a:lstStyle/>
+          <a:p>
+            <a:r>
+              <a:rPr sz="4400" b="1">
+                <a:solidFill>
+                  <a:srgbClr val="FFFFFF"/>
+                </a:solidFill>
+                <a:latin typeface="Calibri"/>
+              </a:rPr>
+              <a:t>Bootloader Overview</a:t>
+            </a:r>
+          </a:p>
+        </p:txBody>
+      </p:sp>
+      <p:sp>
+        <p:nvSpPr>
+          <p:cNvPr id="3" name="Subtitle 2"/>
+          <p:cNvSpPr>
+            <a:spLocks noGrp="1"/>
+          </p:cNvSpPr>
+          <p:nvPr>
+            <p:ph type="subTitle" idx="1"/>
+          </p:nvPr>
+        </p:nvSpPr>
+        <p:spPr/>
+        <p:txBody>
+          <a:bodyPr/>
+          <a:lstStyle/>
+          <a:p>
+            <a:r>
+              <a:rPr sz="1800" dirty="0">
+                <a:solidFill>
+                  <a:srgbClr val="FFFFFF"/>
+                </a:solidFill>
+                <a:latin typeface="Calibri"/>
+              </a:rPr>
+              <a:t>U-Boot, EFI, GRUB — where kernel meets hardware</a:t>
+            </a:r>
+          </a:p>
+        </p:txBody>
+      </p:sp>
+    </p:spTree>
+  </p:cSld>
+  <p:clrMapOvr>
+    <a:masterClrMapping/>
+  </p:clrMapOvr>
+</p:sld>
+</file>
+
+<file path=ppt/slides/slide2.xml><?xml version="1.0" encoding="utf-8"?>
+<p:sld xmlns:a="http://schemas.openxmlformats.org/drawingml/2006/main" xmlns:r="http://schemas.openxmlformats.org/officeDocument/2006/relationships" xmlns:p="http://schemas.openxmlformats.org/presentationml/2006/main">
+  <p:cSld>
+    <p:spTree>
+      <p:nvGrpSpPr>
+        <p:cNvPr id="1" name=""/>
+        <p:cNvGrpSpPr/>
+        <p:nvPr/>
+      </p:nvGrpSpPr>
+      <p:grpSpPr>
+        <a:xfrm>
+          <a:off x="0" y="0"/>
+          <a:ext cx="0" cy="0"/>
+          <a:chOff x="0" y="0"/>
+          <a:chExt cx="0" cy="0"/>
+        </a:xfrm>
+      </p:grpSpPr>
       <p:sp>
         <p:nvSpPr>
           <p:cNvPr id="2" name="Title 1"/>
@@ -5204,13 +5290,162 @@
           <a:lstStyle/>
           <a:p>
             <a:r>
-              <a:rPr sz="3200" b="1">
-                <a:solidFill>
-                  <a:srgbClr val="CC0066"/>
-                </a:solidFill>
-                <a:latin typeface="Calibri"/>
-              </a:rPr>
-              <a:t>Three Bootloader Families</a:t>
+              <a:rPr sz="3200" b="1" dirty="0">
+                <a:latin typeface="Calibri"/>
+              </a:rPr>
+              <a:t>Session Agenda</a:t>
+            </a:r>
+          </a:p>
+        </p:txBody>
+      </p:sp>
+      <p:sp>
+        <p:nvSpPr>
+          <p:cNvPr id="3" name="TextBox 2"/>
+          <p:cNvSpPr txBox="1"/>
+          <p:nvPr/>
+        </p:nvSpPr>
+        <p:spPr>
+          <a:xfrm>
+            <a:off x="822960" y="1463040"/>
+            <a:ext cx="10515600" cy="5029200"/>
+          </a:xfrm>
+          <a:prstGeom prst="rect">
+            <a:avLst/>
+          </a:prstGeom>
+          <a:noFill/>
+        </p:spPr>
+        <p:txBody>
+          <a:bodyPr wrap="square" lIns="45720" rIns="45720">
+            <a:spAutoFit/>
+          </a:bodyPr>
+          <a:lstStyle/>
+          <a:p>
+            <a:pPr>
+              <a:spcAft>
+                <a:spcPts val="600"/>
+              </a:spcAft>
+            </a:pPr>
+            <a:r>
+              <a:rPr sz="2000" b="0" i="0">
+                <a:solidFill>
+                  <a:srgbClr val="333333"/>
+                </a:solidFill>
+                <a:latin typeface="Calibri"/>
+              </a:rPr>
+              <a:t>1.  What a bootloader does</a:t>
+            </a:r>
+          </a:p>
+          <a:p>
+            <a:pPr>
+              <a:spcAft>
+                <a:spcPts val="600"/>
+              </a:spcAft>
+            </a:pPr>
+            <a:r>
+              <a:rPr sz="2000" b="0" i="0">
+                <a:solidFill>
+                  <a:srgbClr val="333333"/>
+                </a:solidFill>
+                <a:latin typeface="Calibri"/>
+              </a:rPr>
+              <a:t>2.  Three families — U-Boot, EFI, GRUB</a:t>
+            </a:r>
+          </a:p>
+          <a:p>
+            <a:pPr>
+              <a:spcAft>
+                <a:spcPts val="600"/>
+              </a:spcAft>
+            </a:pPr>
+            <a:r>
+              <a:rPr sz="2000" b="0" i="0">
+                <a:solidFill>
+                  <a:srgbClr val="333333"/>
+                </a:solidFill>
+                <a:latin typeface="Calibri"/>
+              </a:rPr>
+              <a:t>3.  When to use which</a:t>
+            </a:r>
+          </a:p>
+          <a:p>
+            <a:pPr>
+              <a:spcAft>
+                <a:spcPts val="600"/>
+              </a:spcAft>
+            </a:pPr>
+            <a:r>
+              <a:rPr sz="2000" b="0" i="0">
+                <a:solidFill>
+                  <a:srgbClr val="333333"/>
+                </a:solidFill>
+                <a:latin typeface="Calibri"/>
+              </a:rPr>
+              <a:t>4.  How Yocto handles bootloader config</a:t>
+            </a:r>
+          </a:p>
+          <a:p>
+            <a:pPr>
+              <a:spcAft>
+                <a:spcPts val="600"/>
+              </a:spcAft>
+            </a:pPr>
+            <a:r>
+              <a:rPr sz="2000" b="0" i="0">
+                <a:solidFill>
+                  <a:srgbClr val="333333"/>
+                </a:solidFill>
+                <a:latin typeface="Calibri"/>
+              </a:rPr>
+              <a:t>5.  Boot arguments — passing info to the kernel</a:t>
+            </a:r>
+          </a:p>
+        </p:txBody>
+      </p:sp>
+    </p:spTree>
+  </p:cSld>
+  <p:clrMapOvr>
+    <a:masterClrMapping/>
+  </p:clrMapOvr>
+</p:sld>
+</file>
+
+<file path=ppt/slides/slide3.xml><?xml version="1.0" encoding="utf-8"?>
+<p:sld xmlns:a="http://schemas.openxmlformats.org/drawingml/2006/main" xmlns:r="http://schemas.openxmlformats.org/officeDocument/2006/relationships" xmlns:p="http://schemas.openxmlformats.org/presentationml/2006/main">
+  <p:cSld>
+    <p:spTree>
+      <p:nvGrpSpPr>
+        <p:cNvPr id="1" name=""/>
+        <p:cNvGrpSpPr/>
+        <p:nvPr/>
+      </p:nvGrpSpPr>
+      <p:grpSpPr>
+        <a:xfrm>
+          <a:off x="0" y="0"/>
+          <a:ext cx="0" cy="0"/>
+          <a:chOff x="0" y="0"/>
+          <a:chExt cx="0" cy="0"/>
+        </a:xfrm>
+      </p:grpSpPr>
+      <p:sp>
+        <p:nvSpPr>
+          <p:cNvPr id="2" name="Title 1"/>
+          <p:cNvSpPr>
+            <a:spLocks noGrp="1"/>
+          </p:cNvSpPr>
+          <p:nvPr>
+            <p:ph type="title"/>
+          </p:nvPr>
+        </p:nvSpPr>
+        <p:spPr/>
+        <p:txBody>
+          <a:bodyPr/>
+          <a:lstStyle/>
+          <a:p>
+            <a:r>
+              <a:rPr sz="3200" b="1" dirty="0">
+                <a:latin typeface="Calibri"/>
+              </a:rPr>
+              <a:t>What a Bootloader Does</a:t>
             </a:r>
           </a:p>
         </p:txBody>
@@ -5232,7 +5467,730 @@
           <a:noFill/>
         </p:spPr>
         <p:txBody>
-          <a:bodyPr wrap="square" anchor="t" lIns="45720" rIns="45720">
+          <a:bodyPr wrap="square" lIns="45720" rIns="45720" anchor="t">
+            <a:spAutoFit/>
+          </a:bodyPr>
+          <a:lstStyle/>
+          <a:p>
+            <a:pPr algn="l"/>
+            <a:r>
+              <a:rPr sz="1500" b="0" i="1">
+                <a:solidFill>
+                  <a:srgbClr val="666666"/>
+                </a:solidFill>
+                <a:latin typeface="Calibri"/>
+              </a:rPr>
+              <a:t>The bridge from power-on to a running kernel.</a:t>
+            </a:r>
+          </a:p>
+        </p:txBody>
+      </p:sp>
+      <p:sp>
+        <p:nvSpPr>
+          <p:cNvPr id="4" name="Rounded Rectangle 3"/>
+          <p:cNvSpPr/>
+          <p:nvPr/>
+        </p:nvSpPr>
+        <p:spPr>
+          <a:xfrm>
+            <a:off x="379476" y="2103120"/>
+            <a:ext cx="2249424" cy="640080"/>
+          </a:xfrm>
+          <a:prstGeom prst="roundRect">
+            <a:avLst/>
+          </a:prstGeom>
+          <a:solidFill>
+            <a:srgbClr val="FCE4EC"/>
+          </a:solidFill>
+          <a:ln w="6350">
+            <a:solidFill>
+              <a:srgbClr val="CC0066"/>
+            </a:solidFill>
+          </a:ln>
+          <a:effectLst/>
+        </p:spPr>
+        <p:style>
+          <a:lnRef idx="1">
+            <a:schemeClr val="accent1"/>
+          </a:lnRef>
+          <a:fillRef idx="3">
+            <a:schemeClr val="accent1"/>
+          </a:fillRef>
+          <a:effectRef idx="2">
+            <a:schemeClr val="accent1"/>
+          </a:effectRef>
+          <a:fontRef idx="minor">
+            <a:schemeClr val="lt1"/>
+          </a:fontRef>
+        </p:style>
+        <p:txBody>
+          <a:bodyPr lIns="18288" rIns="18288" rtlCol="0" anchor="ctr"/>
+          <a:lstStyle/>
+          <a:p>
+            <a:pPr algn="ctr"/>
+            <a:r>
+              <a:rPr sz="1100" b="1">
+                <a:solidFill>
+                  <a:srgbClr val="663399"/>
+                </a:solidFill>
+                <a:latin typeface="Consolas"/>
+              </a:rPr>
+              <a:t>Power on</a:t>
+            </a:r>
+          </a:p>
+        </p:txBody>
+      </p:sp>
+      <p:sp>
+        <p:nvSpPr>
+          <p:cNvPr id="5" name="TextBox 4"/>
+          <p:cNvSpPr txBox="1"/>
+          <p:nvPr/>
+        </p:nvSpPr>
+        <p:spPr>
+          <a:xfrm>
+            <a:off x="379476" y="2788920"/>
+            <a:ext cx="2249424" cy="320040"/>
+          </a:xfrm>
+          <a:prstGeom prst="rect">
+            <a:avLst/>
+          </a:prstGeom>
+          <a:noFill/>
+        </p:spPr>
+        <p:txBody>
+          <a:bodyPr wrap="square" lIns="45720" rIns="45720" anchor="t">
+            <a:spAutoFit/>
+          </a:bodyPr>
+          <a:lstStyle/>
+          <a:p>
+            <a:pPr algn="ctr"/>
+            <a:r>
+              <a:rPr sz="900" b="0" i="0">
+                <a:solidFill>
+                  <a:srgbClr val="666666"/>
+                </a:solidFill>
+                <a:latin typeface="Calibri"/>
+              </a:rPr>
+              <a:t>Reset vector</a:t>
+            </a:r>
+          </a:p>
+        </p:txBody>
+      </p:sp>
+      <p:sp>
+        <p:nvSpPr>
+          <p:cNvPr id="6" name="Rounded Rectangle 5"/>
+          <p:cNvSpPr/>
+          <p:nvPr/>
+        </p:nvSpPr>
+        <p:spPr>
+          <a:xfrm>
+            <a:off x="2674620" y="2103120"/>
+            <a:ext cx="2249424" cy="640080"/>
+          </a:xfrm>
+          <a:prstGeom prst="roundRect">
+            <a:avLst/>
+          </a:prstGeom>
+          <a:solidFill>
+            <a:srgbClr val="FCE4EC"/>
+          </a:solidFill>
+          <a:ln w="6350">
+            <a:solidFill>
+              <a:srgbClr val="CC0066"/>
+            </a:solidFill>
+          </a:ln>
+          <a:effectLst/>
+        </p:spPr>
+        <p:style>
+          <a:lnRef idx="1">
+            <a:schemeClr val="accent1"/>
+          </a:lnRef>
+          <a:fillRef idx="3">
+            <a:schemeClr val="accent1"/>
+          </a:fillRef>
+          <a:effectRef idx="2">
+            <a:schemeClr val="accent1"/>
+          </a:effectRef>
+          <a:fontRef idx="minor">
+            <a:schemeClr val="lt1"/>
+          </a:fontRef>
+        </p:style>
+        <p:txBody>
+          <a:bodyPr lIns="18288" rIns="18288" rtlCol="0" anchor="ctr"/>
+          <a:lstStyle/>
+          <a:p>
+            <a:pPr algn="ctr"/>
+            <a:r>
+              <a:rPr sz="1100" b="1">
+                <a:solidFill>
+                  <a:srgbClr val="663399"/>
+                </a:solidFill>
+                <a:latin typeface="Consolas"/>
+              </a:rPr>
+              <a:t>ROM code</a:t>
+            </a:r>
+          </a:p>
+        </p:txBody>
+      </p:sp>
+      <p:sp>
+        <p:nvSpPr>
+          <p:cNvPr id="7" name="TextBox 6"/>
+          <p:cNvSpPr txBox="1"/>
+          <p:nvPr/>
+        </p:nvSpPr>
+        <p:spPr>
+          <a:xfrm>
+            <a:off x="2674620" y="2788920"/>
+            <a:ext cx="2249424" cy="320040"/>
+          </a:xfrm>
+          <a:prstGeom prst="rect">
+            <a:avLst/>
+          </a:prstGeom>
+          <a:noFill/>
+        </p:spPr>
+        <p:txBody>
+          <a:bodyPr wrap="square" lIns="45720" rIns="45720" anchor="t">
+            <a:spAutoFit/>
+          </a:bodyPr>
+          <a:lstStyle/>
+          <a:p>
+            <a:pPr algn="ctr"/>
+            <a:r>
+              <a:rPr sz="900" b="0" i="0">
+                <a:solidFill>
+                  <a:srgbClr val="666666"/>
+                </a:solidFill>
+                <a:latin typeface="Calibri"/>
+              </a:rPr>
+              <a:t>Vendor first-stage</a:t>
+            </a:r>
+          </a:p>
+        </p:txBody>
+      </p:sp>
+      <p:sp>
+        <p:nvSpPr>
+          <p:cNvPr id="8" name="Rounded Rectangle 7"/>
+          <p:cNvSpPr/>
+          <p:nvPr/>
+        </p:nvSpPr>
+        <p:spPr>
+          <a:xfrm>
+            <a:off x="4969764" y="2103120"/>
+            <a:ext cx="2249424" cy="640080"/>
+          </a:xfrm>
+          <a:prstGeom prst="roundRect">
+            <a:avLst/>
+          </a:prstGeom>
+          <a:solidFill>
+            <a:srgbClr val="E9D8F0"/>
+          </a:solidFill>
+          <a:ln w="6350">
+            <a:solidFill>
+              <a:srgbClr val="CC0066"/>
+            </a:solidFill>
+          </a:ln>
+          <a:effectLst/>
+        </p:spPr>
+        <p:style>
+          <a:lnRef idx="1">
+            <a:schemeClr val="accent1"/>
+          </a:lnRef>
+          <a:fillRef idx="3">
+            <a:schemeClr val="accent1"/>
+          </a:fillRef>
+          <a:effectRef idx="2">
+            <a:schemeClr val="accent1"/>
+          </a:effectRef>
+          <a:fontRef idx="minor">
+            <a:schemeClr val="lt1"/>
+          </a:fontRef>
+        </p:style>
+        <p:txBody>
+          <a:bodyPr lIns="18288" rIns="18288" rtlCol="0" anchor="ctr"/>
+          <a:lstStyle/>
+          <a:p>
+            <a:pPr algn="ctr"/>
+            <a:r>
+              <a:rPr sz="1100" b="1">
+                <a:solidFill>
+                  <a:srgbClr val="663399"/>
+                </a:solidFill>
+                <a:latin typeface="Consolas"/>
+              </a:rPr>
+              <a:t>SPL</a:t>
+            </a:r>
+          </a:p>
+        </p:txBody>
+      </p:sp>
+      <p:sp>
+        <p:nvSpPr>
+          <p:cNvPr id="9" name="TextBox 8"/>
+          <p:cNvSpPr txBox="1"/>
+          <p:nvPr/>
+        </p:nvSpPr>
+        <p:spPr>
+          <a:xfrm>
+            <a:off x="4969764" y="2788920"/>
+            <a:ext cx="2249424" cy="320040"/>
+          </a:xfrm>
+          <a:prstGeom prst="rect">
+            <a:avLst/>
+          </a:prstGeom>
+          <a:noFill/>
+        </p:spPr>
+        <p:txBody>
+          <a:bodyPr wrap="square" lIns="45720" rIns="45720" anchor="t">
+            <a:spAutoFit/>
+          </a:bodyPr>
+          <a:lstStyle/>
+          <a:p>
+            <a:pPr algn="ctr"/>
+            <a:r>
+              <a:rPr sz="900" b="0" i="0">
+                <a:solidFill>
+                  <a:srgbClr val="666666"/>
+                </a:solidFill>
+                <a:latin typeface="Calibri"/>
+              </a:rPr>
+              <a:t>Second-stage loader</a:t>
+            </a:r>
+          </a:p>
+        </p:txBody>
+      </p:sp>
+      <p:sp>
+        <p:nvSpPr>
+          <p:cNvPr id="10" name="Rounded Rectangle 9"/>
+          <p:cNvSpPr/>
+          <p:nvPr/>
+        </p:nvSpPr>
+        <p:spPr>
+          <a:xfrm>
+            <a:off x="7264907" y="2103120"/>
+            <a:ext cx="2249424" cy="640080"/>
+          </a:xfrm>
+          <a:prstGeom prst="roundRect">
+            <a:avLst/>
+          </a:prstGeom>
+          <a:solidFill>
+            <a:srgbClr val="E9D8F0"/>
+          </a:solidFill>
+          <a:ln w="6350">
+            <a:solidFill>
+              <a:srgbClr val="CC0066"/>
+            </a:solidFill>
+          </a:ln>
+          <a:effectLst/>
+        </p:spPr>
+        <p:style>
+          <a:lnRef idx="1">
+            <a:schemeClr val="accent1"/>
+          </a:lnRef>
+          <a:fillRef idx="3">
+            <a:schemeClr val="accent1"/>
+          </a:fillRef>
+          <a:effectRef idx="2">
+            <a:schemeClr val="accent1"/>
+          </a:effectRef>
+          <a:fontRef idx="minor">
+            <a:schemeClr val="lt1"/>
+          </a:fontRef>
+        </p:style>
+        <p:txBody>
+          <a:bodyPr lIns="18288" rIns="18288" rtlCol="0" anchor="ctr"/>
+          <a:lstStyle/>
+          <a:p>
+            <a:pPr algn="ctr"/>
+            <a:r>
+              <a:rPr sz="1100" b="1">
+                <a:solidFill>
+                  <a:srgbClr val="663399"/>
+                </a:solidFill>
+                <a:latin typeface="Consolas"/>
+              </a:rPr>
+              <a:t>U-Boot</a:t>
+            </a:r>
+          </a:p>
+        </p:txBody>
+      </p:sp>
+      <p:sp>
+        <p:nvSpPr>
+          <p:cNvPr id="11" name="TextBox 10"/>
+          <p:cNvSpPr txBox="1"/>
+          <p:nvPr/>
+        </p:nvSpPr>
+        <p:spPr>
+          <a:xfrm>
+            <a:off x="7264907" y="2788920"/>
+            <a:ext cx="2249424" cy="320040"/>
+          </a:xfrm>
+          <a:prstGeom prst="rect">
+            <a:avLst/>
+          </a:prstGeom>
+          <a:noFill/>
+        </p:spPr>
+        <p:txBody>
+          <a:bodyPr wrap="square" lIns="45720" rIns="45720" anchor="t">
+            <a:spAutoFit/>
+          </a:bodyPr>
+          <a:lstStyle/>
+          <a:p>
+            <a:pPr algn="ctr"/>
+            <a:r>
+              <a:rPr sz="900" b="0" i="0">
+                <a:solidFill>
+                  <a:srgbClr val="666666"/>
+                </a:solidFill>
+                <a:latin typeface="Calibri"/>
+              </a:rPr>
+              <a:t>Full bootloader</a:t>
+            </a:r>
+          </a:p>
+        </p:txBody>
+      </p:sp>
+      <p:sp>
+        <p:nvSpPr>
+          <p:cNvPr id="12" name="Rounded Rectangle 11"/>
+          <p:cNvSpPr/>
+          <p:nvPr/>
+        </p:nvSpPr>
+        <p:spPr>
+          <a:xfrm>
+            <a:off x="9560051" y="2103120"/>
+            <a:ext cx="2249424" cy="640080"/>
+          </a:xfrm>
+          <a:prstGeom prst="roundRect">
+            <a:avLst/>
+          </a:prstGeom>
+          <a:solidFill>
+            <a:srgbClr val="E9D8F0"/>
+          </a:solidFill>
+          <a:ln w="6350">
+            <a:solidFill>
+              <a:srgbClr val="CC0066"/>
+            </a:solidFill>
+          </a:ln>
+          <a:effectLst/>
+        </p:spPr>
+        <p:style>
+          <a:lnRef idx="1">
+            <a:schemeClr val="accent1"/>
+          </a:lnRef>
+          <a:fillRef idx="3">
+            <a:schemeClr val="accent1"/>
+          </a:fillRef>
+          <a:effectRef idx="2">
+            <a:schemeClr val="accent1"/>
+          </a:effectRef>
+          <a:fontRef idx="minor">
+            <a:schemeClr val="lt1"/>
+          </a:fontRef>
+        </p:style>
+        <p:txBody>
+          <a:bodyPr lIns="18288" rIns="18288" rtlCol="0" anchor="ctr"/>
+          <a:lstStyle/>
+          <a:p>
+            <a:pPr algn="ctr"/>
+            <a:r>
+              <a:rPr sz="1100" b="1">
+                <a:solidFill>
+                  <a:srgbClr val="663399"/>
+                </a:solidFill>
+                <a:latin typeface="Consolas"/>
+              </a:rPr>
+              <a:t>Kernel</a:t>
+            </a:r>
+          </a:p>
+        </p:txBody>
+      </p:sp>
+      <p:sp>
+        <p:nvSpPr>
+          <p:cNvPr id="13" name="TextBox 12"/>
+          <p:cNvSpPr txBox="1"/>
+          <p:nvPr/>
+        </p:nvSpPr>
+        <p:spPr>
+          <a:xfrm>
+            <a:off x="9560051" y="2788920"/>
+            <a:ext cx="2249424" cy="320040"/>
+          </a:xfrm>
+          <a:prstGeom prst="rect">
+            <a:avLst/>
+          </a:prstGeom>
+          <a:noFill/>
+        </p:spPr>
+        <p:txBody>
+          <a:bodyPr wrap="square" lIns="45720" rIns="45720" anchor="t">
+            <a:spAutoFit/>
+          </a:bodyPr>
+          <a:lstStyle/>
+          <a:p>
+            <a:pPr algn="ctr"/>
+            <a:r>
+              <a:rPr sz="900" b="0" i="0">
+                <a:solidFill>
+                  <a:srgbClr val="666666"/>
+                </a:solidFill>
+                <a:latin typeface="Calibri"/>
+              </a:rPr>
+              <a:t>Linux takes over</a:t>
+            </a:r>
+          </a:p>
+        </p:txBody>
+      </p:sp>
+      <p:sp>
+        <p:nvSpPr>
+          <p:cNvPr id="14" name="TextBox 13"/>
+          <p:cNvSpPr txBox="1"/>
+          <p:nvPr/>
+        </p:nvSpPr>
+        <p:spPr>
+          <a:xfrm>
+            <a:off x="609600" y="3264309"/>
+            <a:ext cx="10515600" cy="2262158"/>
+          </a:xfrm>
+          <a:prstGeom prst="rect">
+            <a:avLst/>
+          </a:prstGeom>
+          <a:noFill/>
+        </p:spPr>
+        <p:txBody>
+          <a:bodyPr wrap="square" lIns="45720" rIns="45720">
+            <a:spAutoFit/>
+          </a:bodyPr>
+          <a:lstStyle/>
+          <a:p>
+            <a:pPr>
+              <a:spcAft>
+                <a:spcPts val="600"/>
+              </a:spcAft>
+            </a:pPr>
+            <a:r>
+              <a:rPr sz="2000" b="1" i="0" dirty="0">
+                <a:solidFill>
+                  <a:srgbClr val="CC0066"/>
+                </a:solidFill>
+                <a:latin typeface="Calibri"/>
+              </a:rPr>
+              <a:t>What the bootloader actually does</a:t>
+            </a:r>
+          </a:p>
+          <a:p>
+            <a:pPr>
+              <a:spcAft>
+                <a:spcPts val="400"/>
+              </a:spcAft>
+            </a:pPr>
+            <a:r>
+              <a:rPr sz="1600" b="0" i="0" dirty="0">
+                <a:solidFill>
+                  <a:srgbClr val="333333"/>
+                </a:solidFill>
+                <a:latin typeface="Calibri"/>
+              </a:rPr>
+              <a:t>• Init DRAM, clocks, basic peripherals</a:t>
+            </a:r>
+          </a:p>
+          <a:p>
+            <a:pPr>
+              <a:spcAft>
+                <a:spcPts val="400"/>
+              </a:spcAft>
+            </a:pPr>
+            <a:r>
+              <a:rPr sz="1600" b="0" i="0" dirty="0">
+                <a:solidFill>
+                  <a:srgbClr val="333333"/>
+                </a:solidFill>
+                <a:latin typeface="Calibri"/>
+              </a:rPr>
+              <a:t>• Load the kernel image into RAM from flash/SD/eMMC/network</a:t>
+            </a:r>
+          </a:p>
+          <a:p>
+            <a:pPr>
+              <a:spcAft>
+                <a:spcPts val="400"/>
+              </a:spcAft>
+            </a:pPr>
+            <a:r>
+              <a:rPr sz="1600" b="0" i="0" dirty="0">
+                <a:solidFill>
+                  <a:srgbClr val="333333"/>
+                </a:solidFill>
+                <a:latin typeface="Calibri"/>
+              </a:rPr>
+              <a:t>• Load the device tree blob (DTB)</a:t>
+            </a:r>
+          </a:p>
+          <a:p>
+            <a:pPr>
+              <a:spcAft>
+                <a:spcPts val="400"/>
+              </a:spcAft>
+            </a:pPr>
+            <a:r>
+              <a:rPr sz="1600" b="0" i="0" dirty="0">
+                <a:solidFill>
+                  <a:srgbClr val="333333"/>
+                </a:solidFill>
+                <a:latin typeface="Calibri"/>
+              </a:rPr>
+              <a:t>• Pass boot arguments to the kernel</a:t>
+            </a:r>
+          </a:p>
+          <a:p>
+            <a:pPr>
+              <a:spcAft>
+                <a:spcPts val="800"/>
+              </a:spcAft>
+            </a:pPr>
+            <a:r>
+              <a:rPr sz="1600" b="0" i="0" dirty="0">
+                <a:solidFill>
+                  <a:srgbClr val="333333"/>
+                </a:solidFill>
+                <a:latin typeface="Calibri"/>
+              </a:rPr>
+              <a:t>• Jump to the kernel entry point</a:t>
+            </a:r>
+          </a:p>
+          <a:p>
+            <a:pPr>
+              <a:spcAft>
+                <a:spcPts val="400"/>
+              </a:spcAft>
+            </a:pPr>
+            <a:r>
+              <a:rPr sz="1600" b="0" i="1" dirty="0">
+                <a:solidFill>
+                  <a:srgbClr val="333333"/>
+                </a:solidFill>
+                <a:latin typeface="Calibri"/>
+              </a:rPr>
+              <a:t>From there, the kernel runs </a:t>
+            </a:r>
+            <a:r>
+              <a:rPr sz="1600" b="0" i="1" dirty="0" err="1">
+                <a:solidFill>
+                  <a:srgbClr val="333333"/>
+                </a:solidFill>
+                <a:latin typeface="Calibri"/>
+              </a:rPr>
+              <a:t>init</a:t>
+            </a:r>
+            <a:r>
+              <a:rPr sz="1600" b="0" i="1" dirty="0">
+                <a:solidFill>
+                  <a:srgbClr val="333333"/>
+                </a:solidFill>
+                <a:latin typeface="Calibri"/>
+              </a:rPr>
+              <a:t>, mounts the </a:t>
+            </a:r>
+            <a:r>
+              <a:rPr sz="1600" b="0" i="1" dirty="0" err="1">
+                <a:solidFill>
+                  <a:srgbClr val="333333"/>
+                </a:solidFill>
+                <a:latin typeface="Calibri"/>
+              </a:rPr>
+              <a:t>rootfs</a:t>
+            </a:r>
+            <a:r>
+              <a:rPr sz="1600" b="0" i="1" dirty="0">
+                <a:solidFill>
+                  <a:srgbClr val="333333"/>
+                </a:solidFill>
+                <a:latin typeface="Calibri"/>
+              </a:rPr>
+              <a:t>, starts </a:t>
+            </a:r>
+            <a:r>
+              <a:rPr sz="1600" b="0" i="1" dirty="0" err="1">
+                <a:solidFill>
+                  <a:srgbClr val="333333"/>
+                </a:solidFill>
+                <a:latin typeface="Calibri"/>
+              </a:rPr>
+              <a:t>systemd</a:t>
+            </a:r>
+            <a:r>
+              <a:rPr sz="1600" b="0" i="1" dirty="0">
+                <a:solidFill>
+                  <a:srgbClr val="333333"/>
+                </a:solidFill>
+                <a:latin typeface="Calibri"/>
+              </a:rPr>
+              <a:t>, and you have a system.</a:t>
+            </a:r>
+          </a:p>
+        </p:txBody>
+      </p:sp>
+    </p:spTree>
+  </p:cSld>
+  <p:clrMapOvr>
+    <a:masterClrMapping/>
+  </p:clrMapOvr>
+</p:sld>
+</file>
+
+<file path=ppt/slides/slide4.xml><?xml version="1.0" encoding="utf-8"?>
+<p:sld xmlns:a="http://schemas.openxmlformats.org/drawingml/2006/main" xmlns:r="http://schemas.openxmlformats.org/officeDocument/2006/relationships" xmlns:p="http://schemas.openxmlformats.org/presentationml/2006/main">
+  <p:cSld>
+    <p:spTree>
+      <p:nvGrpSpPr>
+        <p:cNvPr id="1" name=""/>
+        <p:cNvGrpSpPr/>
+        <p:nvPr/>
+      </p:nvGrpSpPr>
+      <p:grpSpPr>
+        <a:xfrm>
+          <a:off x="0" y="0"/>
+          <a:ext cx="0" cy="0"/>
+          <a:chOff x="0" y="0"/>
+          <a:chExt cx="0" cy="0"/>
+        </a:xfrm>
+      </p:grpSpPr>
+      <p:sp>
+        <p:nvSpPr>
+          <p:cNvPr id="2" name="Title 1"/>
+          <p:cNvSpPr>
+            <a:spLocks noGrp="1"/>
+          </p:cNvSpPr>
+          <p:nvPr>
+            <p:ph type="title"/>
+          </p:nvPr>
+        </p:nvSpPr>
+        <p:spPr/>
+        <p:txBody>
+          <a:bodyPr/>
+          <a:lstStyle/>
+          <a:p>
+            <a:r>
+              <a:rPr sz="3200" b="1" dirty="0">
+                <a:latin typeface="Calibri"/>
+              </a:rPr>
+              <a:t>Three Bootloader Families</a:t>
+            </a:r>
+          </a:p>
+        </p:txBody>
+      </p:sp>
+      <p:sp>
+        <p:nvSpPr>
+          <p:cNvPr id="3" name="TextBox 2"/>
+          <p:cNvSpPr txBox="1"/>
+          <p:nvPr/>
+        </p:nvSpPr>
+        <p:spPr>
+          <a:xfrm>
+            <a:off x="822960" y="1417320"/>
+            <a:ext cx="10515600" cy="365760"/>
+          </a:xfrm>
+          <a:prstGeom prst="rect">
+            <a:avLst/>
+          </a:prstGeom>
+          <a:noFill/>
+        </p:spPr>
+        <p:txBody>
+          <a:bodyPr wrap="square" lIns="45720" rIns="45720" anchor="t">
             <a:spAutoFit/>
           </a:bodyPr>
           <a:lstStyle/>
@@ -5287,7 +6245,7 @@
           </a:fontRef>
         </p:style>
         <p:txBody>
-          <a:bodyPr rtlCol="0" anchor="ctr" lIns="182880"/>
+          <a:bodyPr lIns="182880" rtlCol="0" anchor="ctr"/>
           <a:lstStyle/>
           <a:p>
             <a:pPr algn="ctr"/>
@@ -5357,6 +6315,7 @@
           <a:lstStyle/>
           <a:p>
             <a:pPr algn="ctr"/>
+            <a:endParaRPr/>
           </a:p>
         </p:txBody>
       </p:sp>
@@ -5369,7 +6328,7 @@
         <p:spPr>
           <a:xfrm>
             <a:off x="731519" y="2514600"/>
-            <a:ext cx="3337560" cy="3474720"/>
+            <a:ext cx="3337560" cy="3334246"/>
           </a:xfrm>
           <a:prstGeom prst="rect">
             <a:avLst/>
@@ -5388,7 +6347,7 @@
               </a:spcAft>
             </a:pPr>
             <a:r>
-              <a:rPr sz="1200" b="1" i="0">
+              <a:rPr sz="1600" b="1" i="0">
                 <a:solidFill>
                   <a:srgbClr val="CC0066"/>
                 </a:solidFill>
@@ -5404,7 +6363,7 @@
               </a:spcAft>
             </a:pPr>
             <a:r>
-              <a:rPr sz="1100" b="0" i="0">
+              <a:rPr sz="1400" b="0" i="0">
                 <a:solidFill>
                   <a:srgbClr val="333333"/>
                 </a:solidFill>
@@ -5420,7 +6379,7 @@
               </a:spcAft>
             </a:pPr>
             <a:r>
-              <a:rPr sz="1100" b="0" i="0">
+              <a:rPr sz="1400" b="0" i="0">
                 <a:solidFill>
                   <a:srgbClr val="333333"/>
                 </a:solidFill>
@@ -5435,14 +6394,43 @@
                 <a:spcPts val="400"/>
               </a:spcAft>
             </a:pPr>
-            <a:r>
-              <a:rPr sz="1100" b="0" i="0">
+            <a:endParaRPr sz="1400" b="0" i="0">
+              <a:solidFill>
+                <a:srgbClr val="333333"/>
+              </a:solidFill>
+              <a:latin typeface="Calibri"/>
+            </a:endParaRPr>
+          </a:p>
+          <a:p>
+            <a:pPr>
+              <a:spcAft>
+                <a:spcPts val="400"/>
+              </a:spcAft>
+            </a:pPr>
+            <a:r>
+              <a:rPr sz="1600" b="1" i="0">
+                <a:solidFill>
+                  <a:srgbClr val="CC0066"/>
+                </a:solidFill>
+                <a:latin typeface="Calibri"/>
+              </a:rPr>
+              <a:t>Used on:</a:t>
+            </a:r>
+          </a:p>
+          <a:p>
+            <a:pPr>
+              <a:spcAft>
+                <a:spcPts val="400"/>
+              </a:spcAft>
+            </a:pPr>
+            <a:r>
+              <a:rPr sz="1400" b="0" i="0">
                 <a:solidFill>
                   <a:srgbClr val="333333"/>
                 </a:solidFill>
                 <a:latin typeface="Calibri"/>
               </a:rPr>
-              <a:t/>
+              <a:t>Most ARM SoCs</a:t>
             </a:r>
           </a:p>
           <a:p>
@@ -5452,13 +6440,42 @@
               </a:spcAft>
             </a:pPr>
             <a:r>
-              <a:rPr sz="1200" b="1" i="0">
+              <a:rPr sz="1400" b="0" i="0">
+                <a:solidFill>
+                  <a:srgbClr val="333333"/>
+                </a:solidFill>
+                <a:latin typeface="Calibri"/>
+              </a:rPr>
+              <a:t>Most embedded products</a:t>
+            </a:r>
+          </a:p>
+          <a:p>
+            <a:pPr>
+              <a:spcAft>
+                <a:spcPts val="400"/>
+              </a:spcAft>
+            </a:pPr>
+            <a:endParaRPr sz="1400" b="0" i="0">
+              <a:solidFill>
+                <a:srgbClr val="333333"/>
+              </a:solidFill>
+              <a:latin typeface="Calibri"/>
+            </a:endParaRPr>
+          </a:p>
+          <a:p>
+            <a:pPr>
+              <a:spcAft>
+                <a:spcPts val="400"/>
+              </a:spcAft>
+            </a:pPr>
+            <a:r>
+              <a:rPr sz="1600" b="1" i="0">
                 <a:solidFill>
                   <a:srgbClr val="CC0066"/>
                 </a:solidFill>
                 <a:latin typeface="Calibri"/>
               </a:rPr>
-              <a:t>Used on:</a:t>
+              <a:t>Strengths:</a:t>
             </a:r>
           </a:p>
           <a:p>
@@ -5468,13 +6485,13 @@
               </a:spcAft>
             </a:pPr>
             <a:r>
-              <a:rPr sz="1100" b="0" i="0">
+              <a:rPr sz="1400" b="0" i="0">
                 <a:solidFill>
                   <a:srgbClr val="333333"/>
                 </a:solidFill>
                 <a:latin typeface="Calibri"/>
               </a:rPr>
-              <a:t>Most ARM SoCs</a:t>
+              <a:t>Flexible, scriptable,</a:t>
             </a:r>
           </a:p>
           <a:p>
@@ -5484,13 +6501,13 @@
               </a:spcAft>
             </a:pPr>
             <a:r>
-              <a:rPr sz="1100" b="0" i="0">
+              <a:rPr sz="1400" b="0" i="0">
                 <a:solidFill>
                   <a:srgbClr val="333333"/>
                 </a:solidFill>
                 <a:latin typeface="Calibri"/>
               </a:rPr>
-              <a:t>Most embedded products</a:t>
+              <a:t>supports many storage</a:t>
             </a:r>
           </a:p>
           <a:p>
@@ -5500,71 +6517,7 @@
               </a:spcAft>
             </a:pPr>
             <a:r>
-              <a:rPr sz="1100" b="0" i="0">
-                <a:solidFill>
-                  <a:srgbClr val="333333"/>
-                </a:solidFill>
-                <a:latin typeface="Calibri"/>
-              </a:rPr>
-              <a:t/>
-            </a:r>
-          </a:p>
-          <a:p>
-            <a:pPr>
-              <a:spcAft>
-                <a:spcPts val="400"/>
-              </a:spcAft>
-            </a:pPr>
-            <a:r>
-              <a:rPr sz="1200" b="1" i="0">
-                <a:solidFill>
-                  <a:srgbClr val="CC0066"/>
-                </a:solidFill>
-                <a:latin typeface="Calibri"/>
-              </a:rPr>
-              <a:t>Strengths:</a:t>
-            </a:r>
-          </a:p>
-          <a:p>
-            <a:pPr>
-              <a:spcAft>
-                <a:spcPts val="400"/>
-              </a:spcAft>
-            </a:pPr>
-            <a:r>
-              <a:rPr sz="1100" b="0" i="0">
-                <a:solidFill>
-                  <a:srgbClr val="333333"/>
-                </a:solidFill>
-                <a:latin typeface="Calibri"/>
-              </a:rPr>
-              <a:t>Flexible, scriptable,</a:t>
-            </a:r>
-          </a:p>
-          <a:p>
-            <a:pPr>
-              <a:spcAft>
-                <a:spcPts val="400"/>
-              </a:spcAft>
-            </a:pPr>
-            <a:r>
-              <a:rPr sz="1100" b="0" i="0">
-                <a:solidFill>
-                  <a:srgbClr val="333333"/>
-                </a:solidFill>
-                <a:latin typeface="Calibri"/>
-              </a:rPr>
-              <a:t>supports many storage</a:t>
-            </a:r>
-          </a:p>
-          <a:p>
-            <a:pPr>
-              <a:spcAft>
-                <a:spcPts val="400"/>
-              </a:spcAft>
-            </a:pPr>
-            <a:r>
-              <a:rPr sz="1100" b="0" i="0">
+              <a:rPr sz="1400" b="0" i="0">
                 <a:solidFill>
                   <a:srgbClr val="333333"/>
                 </a:solidFill>
@@ -5612,7 +6565,7 @@
           </a:fontRef>
         </p:style>
         <p:txBody>
-          <a:bodyPr rtlCol="0" anchor="ctr" lIns="182880"/>
+          <a:bodyPr lIns="182880" rtlCol="0" anchor="ctr"/>
           <a:lstStyle/>
           <a:p>
             <a:pPr algn="ctr"/>
@@ -5682,6 +6635,7 @@
           <a:lstStyle/>
           <a:p>
             <a:pPr algn="ctr"/>
+            <a:endParaRPr/>
           </a:p>
         </p:txBody>
       </p:sp>
@@ -5694,7 +6648,7 @@
         <p:spPr>
           <a:xfrm>
             <a:off x="4389120" y="2514600"/>
-            <a:ext cx="3337560" cy="3474720"/>
+            <a:ext cx="3337560" cy="3600986"/>
           </a:xfrm>
           <a:prstGeom prst="rect">
             <a:avLst/>
@@ -5713,7 +6667,7 @@
               </a:spcAft>
             </a:pPr>
             <a:r>
-              <a:rPr sz="1200" b="1" i="0">
+              <a:rPr sz="1600" b="1" i="0">
                 <a:solidFill>
                   <a:srgbClr val="663399"/>
                 </a:solidFill>
@@ -5729,7 +6683,7 @@
               </a:spcAft>
             </a:pPr>
             <a:r>
-              <a:rPr sz="1100" b="0" i="0">
+              <a:rPr sz="1400" b="0" i="0">
                 <a:solidFill>
                   <a:srgbClr val="333333"/>
                 </a:solidFill>
@@ -5745,7 +6699,7 @@
               </a:spcAft>
             </a:pPr>
             <a:r>
-              <a:rPr sz="1100" b="0" i="0">
+              <a:rPr sz="1400" b="0" i="0">
                 <a:solidFill>
                   <a:srgbClr val="333333"/>
                 </a:solidFill>
@@ -5760,14 +6714,43 @@
                 <a:spcPts val="400"/>
               </a:spcAft>
             </a:pPr>
-            <a:r>
-              <a:rPr sz="1100" b="0" i="0">
+            <a:endParaRPr sz="1400" b="0" i="0">
+              <a:solidFill>
+                <a:srgbClr val="333333"/>
+              </a:solidFill>
+              <a:latin typeface="Calibri"/>
+            </a:endParaRPr>
+          </a:p>
+          <a:p>
+            <a:pPr>
+              <a:spcAft>
+                <a:spcPts val="400"/>
+              </a:spcAft>
+            </a:pPr>
+            <a:r>
+              <a:rPr sz="1600" b="1" i="0">
+                <a:solidFill>
+                  <a:srgbClr val="663399"/>
+                </a:solidFill>
+                <a:latin typeface="Calibri"/>
+              </a:rPr>
+              <a:t>Used on:</a:t>
+            </a:r>
+          </a:p>
+          <a:p>
+            <a:pPr>
+              <a:spcAft>
+                <a:spcPts val="400"/>
+              </a:spcAft>
+            </a:pPr>
+            <a:r>
+              <a:rPr sz="1400" b="0" i="0">
                 <a:solidFill>
                   <a:srgbClr val="333333"/>
                 </a:solidFill>
                 <a:latin typeface="Calibri"/>
               </a:rPr>
-              <a:t/>
+              <a:t>x86 desktops/servers,</a:t>
             </a:r>
           </a:p>
           <a:p>
@@ -5777,13 +6760,58 @@
               </a:spcAft>
             </a:pPr>
             <a:r>
-              <a:rPr sz="1200" b="1" i="0">
+              <a:rPr sz="1400" b="0" i="0">
+                <a:solidFill>
+                  <a:srgbClr val="333333"/>
+                </a:solidFill>
+                <a:latin typeface="Calibri"/>
+              </a:rPr>
+              <a:t>newer ARM platforms,</a:t>
+            </a:r>
+          </a:p>
+          <a:p>
+            <a:pPr>
+              <a:spcAft>
+                <a:spcPts val="400"/>
+              </a:spcAft>
+            </a:pPr>
+            <a:r>
+              <a:rPr sz="1400" b="0" i="0">
+                <a:solidFill>
+                  <a:srgbClr val="333333"/>
+                </a:solidFill>
+                <a:latin typeface="Calibri"/>
+              </a:rPr>
+              <a:t>RPi5 (optional)</a:t>
+            </a:r>
+          </a:p>
+          <a:p>
+            <a:pPr>
+              <a:spcAft>
+                <a:spcPts val="400"/>
+              </a:spcAft>
+            </a:pPr>
+            <a:endParaRPr sz="1400" b="0" i="0">
+              <a:solidFill>
+                <a:srgbClr val="333333"/>
+              </a:solidFill>
+              <a:latin typeface="Calibri"/>
+            </a:endParaRPr>
+          </a:p>
+          <a:p>
+            <a:pPr>
+              <a:spcAft>
+                <a:spcPts val="400"/>
+              </a:spcAft>
+            </a:pPr>
+            <a:r>
+              <a:rPr sz="1600" b="1" i="0">
                 <a:solidFill>
                   <a:srgbClr val="663399"/>
                 </a:solidFill>
                 <a:latin typeface="Calibri"/>
               </a:rPr>
-              <a:t>Used on:</a:t>
+              <a:t>Strengths:</a:t>
             </a:r>
           </a:p>
           <a:p>
@@ -5793,13 +6821,13 @@
               </a:spcAft>
             </a:pPr>
             <a:r>
-              <a:rPr sz="1100" b="0" i="0">
+              <a:rPr sz="1400" b="0" i="0">
                 <a:solidFill>
                   <a:srgbClr val="333333"/>
                 </a:solidFill>
                 <a:latin typeface="Calibri"/>
               </a:rPr>
-              <a:t>x86 desktops/servers,</a:t>
+              <a:t>Secure Boot,</a:t>
             </a:r>
           </a:p>
           <a:p>
@@ -5809,13 +6837,13 @@
               </a:spcAft>
             </a:pPr>
             <a:r>
-              <a:rPr sz="1100" b="0" i="0">
+              <a:rPr sz="1400" b="0" i="0">
                 <a:solidFill>
                   <a:srgbClr val="333333"/>
                 </a:solidFill>
                 <a:latin typeface="Calibri"/>
               </a:rPr>
-              <a:t>newer ARM platforms,</a:t>
+              <a:t>standardized,</a:t>
             </a:r>
           </a:p>
           <a:p>
@@ -5825,87 +6853,7 @@
               </a:spcAft>
             </a:pPr>
             <a:r>
-              <a:rPr sz="1100" b="0" i="0">
-                <a:solidFill>
-                  <a:srgbClr val="333333"/>
-                </a:solidFill>
-                <a:latin typeface="Calibri"/>
-              </a:rPr>
-              <a:t>RPi5 (optional)</a:t>
-            </a:r>
-          </a:p>
-          <a:p>
-            <a:pPr>
-              <a:spcAft>
-                <a:spcPts val="400"/>
-              </a:spcAft>
-            </a:pPr>
-            <a:r>
-              <a:rPr sz="1100" b="0" i="0">
-                <a:solidFill>
-                  <a:srgbClr val="333333"/>
-                </a:solidFill>
-                <a:latin typeface="Calibri"/>
-              </a:rPr>
-              <a:t/>
-            </a:r>
-          </a:p>
-          <a:p>
-            <a:pPr>
-              <a:spcAft>
-                <a:spcPts val="400"/>
-              </a:spcAft>
-            </a:pPr>
-            <a:r>
-              <a:rPr sz="1200" b="1" i="0">
-                <a:solidFill>
-                  <a:srgbClr val="663399"/>
-                </a:solidFill>
-                <a:latin typeface="Calibri"/>
-              </a:rPr>
-              <a:t>Strengths:</a:t>
-            </a:r>
-          </a:p>
-          <a:p>
-            <a:pPr>
-              <a:spcAft>
-                <a:spcPts val="400"/>
-              </a:spcAft>
-            </a:pPr>
-            <a:r>
-              <a:rPr sz="1100" b="0" i="0">
-                <a:solidFill>
-                  <a:srgbClr val="333333"/>
-                </a:solidFill>
-                <a:latin typeface="Calibri"/>
-              </a:rPr>
-              <a:t>Secure Boot,</a:t>
-            </a:r>
-          </a:p>
-          <a:p>
-            <a:pPr>
-              <a:spcAft>
-                <a:spcPts val="400"/>
-              </a:spcAft>
-            </a:pPr>
-            <a:r>
-              <a:rPr sz="1100" b="0" i="0">
-                <a:solidFill>
-                  <a:srgbClr val="333333"/>
-                </a:solidFill>
-                <a:latin typeface="Calibri"/>
-              </a:rPr>
-              <a:t>standardized,</a:t>
-            </a:r>
-          </a:p>
-          <a:p>
-            <a:pPr>
-              <a:spcAft>
-                <a:spcPts val="400"/>
-              </a:spcAft>
-            </a:pPr>
-            <a:r>
-              <a:rPr sz="1100" b="0" i="0">
+              <a:rPr sz="1400" b="0" i="0">
                 <a:solidFill>
                   <a:srgbClr val="333333"/>
                 </a:solidFill>
@@ -5953,7 +6901,7 @@
           </a:fontRef>
         </p:style>
         <p:txBody>
-          <a:bodyPr rtlCol="0" anchor="ctr" lIns="182880"/>
+          <a:bodyPr lIns="182880" rtlCol="0" anchor="ctr"/>
           <a:lstStyle/>
           <a:p>
             <a:pPr algn="ctr"/>
@@ -6023,6 +6971,7 @@
           <a:lstStyle/>
           <a:p>
             <a:pPr algn="ctr"/>
+            <a:endParaRPr/>
           </a:p>
         </p:txBody>
       </p:sp>
@@ -6035,7 +6984,7 @@
         <p:spPr>
           <a:xfrm>
             <a:off x="8046719" y="2514600"/>
-            <a:ext cx="3337560" cy="3474720"/>
+            <a:ext cx="3337560" cy="3334246"/>
           </a:xfrm>
           <a:prstGeom prst="rect">
             <a:avLst/>
@@ -6054,7 +7003,7 @@
               </a:spcAft>
             </a:pPr>
             <a:r>
-              <a:rPr sz="1200" b="1" i="0">
+              <a:rPr sz="1600" b="1" i="0" dirty="0">
                 <a:solidFill>
                   <a:srgbClr val="CC0066"/>
                 </a:solidFill>
@@ -6070,7 +7019,7 @@
               </a:spcAft>
             </a:pPr>
             <a:r>
-              <a:rPr sz="1100" b="0" i="0">
+              <a:rPr sz="1400" b="0" i="0" dirty="0">
                 <a:solidFill>
                   <a:srgbClr val="333333"/>
                 </a:solidFill>
@@ -6086,7 +7035,7 @@
               </a:spcAft>
             </a:pPr>
             <a:r>
-              <a:rPr sz="1100" b="0" i="0">
+              <a:rPr sz="1400" b="0" i="0" dirty="0">
                 <a:solidFill>
                   <a:srgbClr val="333333"/>
                 </a:solidFill>
@@ -6101,14 +7050,43 @@
                 <a:spcPts val="400"/>
               </a:spcAft>
             </a:pPr>
-            <a:r>
-              <a:rPr sz="1100" b="0" i="0">
+            <a:endParaRPr sz="1400" b="0" i="0" dirty="0">
+              <a:solidFill>
+                <a:srgbClr val="333333"/>
+              </a:solidFill>
+              <a:latin typeface="Calibri"/>
+            </a:endParaRPr>
+          </a:p>
+          <a:p>
+            <a:pPr>
+              <a:spcAft>
+                <a:spcPts val="400"/>
+              </a:spcAft>
+            </a:pPr>
+            <a:r>
+              <a:rPr sz="1600" b="1" i="0" dirty="0">
+                <a:solidFill>
+                  <a:srgbClr val="CC0066"/>
+                </a:solidFill>
+                <a:latin typeface="Calibri"/>
+              </a:rPr>
+              <a:t>Used on:</a:t>
+            </a:r>
+          </a:p>
+          <a:p>
+            <a:pPr>
+              <a:spcAft>
+                <a:spcPts val="400"/>
+              </a:spcAft>
+            </a:pPr>
+            <a:r>
+              <a:rPr sz="1400" b="0" i="0" dirty="0">
                 <a:solidFill>
                   <a:srgbClr val="333333"/>
                 </a:solidFill>
                 <a:latin typeface="Calibri"/>
               </a:rPr>
-              <a:t/>
+              <a:t>x86 servers, full</a:t>
             </a:r>
           </a:p>
           <a:p>
@@ -6118,13 +7096,42 @@
               </a:spcAft>
             </a:pPr>
             <a:r>
-              <a:rPr sz="1200" b="1" i="0">
+              <a:rPr sz="1400" b="0" i="0" dirty="0">
+                <a:solidFill>
+                  <a:srgbClr val="333333"/>
+                </a:solidFill>
+                <a:latin typeface="Calibri"/>
+              </a:rPr>
+              <a:t>desktop-like systems</a:t>
+            </a:r>
+          </a:p>
+          <a:p>
+            <a:pPr>
+              <a:spcAft>
+                <a:spcPts val="400"/>
+              </a:spcAft>
+            </a:pPr>
+            <a:endParaRPr sz="1400" b="0" i="0" dirty="0">
+              <a:solidFill>
+                <a:srgbClr val="333333"/>
+              </a:solidFill>
+              <a:latin typeface="Calibri"/>
+            </a:endParaRPr>
+          </a:p>
+          <a:p>
+            <a:pPr>
+              <a:spcAft>
+                <a:spcPts val="400"/>
+              </a:spcAft>
+            </a:pPr>
+            <a:r>
+              <a:rPr sz="1600" b="1" i="0" dirty="0">
                 <a:solidFill>
                   <a:srgbClr val="CC0066"/>
                 </a:solidFill>
                 <a:latin typeface="Calibri"/>
               </a:rPr>
-              <a:t>Used on:</a:t>
+              <a:t>Strengths:</a:t>
             </a:r>
           </a:p>
           <a:p>
@@ -6134,13 +7141,13 @@
               </a:spcAft>
             </a:pPr>
             <a:r>
-              <a:rPr sz="1100" b="0" i="0">
+              <a:rPr sz="1400" b="0" i="0" dirty="0">
                 <a:solidFill>
                   <a:srgbClr val="333333"/>
                 </a:solidFill>
                 <a:latin typeface="Calibri"/>
               </a:rPr>
-              <a:t>x86 servers, full</a:t>
+              <a:t>Multi-OS boot menus,</a:t>
             </a:r>
           </a:p>
           <a:p>
@@ -6150,13 +7157,13 @@
               </a:spcAft>
             </a:pPr>
             <a:r>
-              <a:rPr sz="1100" b="0" i="0">
+              <a:rPr sz="1400" b="0" i="0" dirty="0">
                 <a:solidFill>
                   <a:srgbClr val="333333"/>
                 </a:solidFill>
                 <a:latin typeface="Calibri"/>
               </a:rPr>
-              <a:t>desktop-like systems</a:t>
+              <a:t>filesystem support,</a:t>
             </a:r>
           </a:p>
           <a:p>
@@ -6166,71 +7173,7 @@
               </a:spcAft>
             </a:pPr>
             <a:r>
-              <a:rPr sz="1100" b="0" i="0">
-                <a:solidFill>
-                  <a:srgbClr val="333333"/>
-                </a:solidFill>
-                <a:latin typeface="Calibri"/>
-              </a:rPr>
-              <a:t/>
-            </a:r>
-          </a:p>
-          <a:p>
-            <a:pPr>
-              <a:spcAft>
-                <a:spcPts val="400"/>
-              </a:spcAft>
-            </a:pPr>
-            <a:r>
-              <a:rPr sz="1200" b="1" i="0">
-                <a:solidFill>
-                  <a:srgbClr val="CC0066"/>
-                </a:solidFill>
-                <a:latin typeface="Calibri"/>
-              </a:rPr>
-              <a:t>Strengths:</a:t>
-            </a:r>
-          </a:p>
-          <a:p>
-            <a:pPr>
-              <a:spcAft>
-                <a:spcPts val="400"/>
-              </a:spcAft>
-            </a:pPr>
-            <a:r>
-              <a:rPr sz="1100" b="0" i="0">
-                <a:solidFill>
-                  <a:srgbClr val="333333"/>
-                </a:solidFill>
-                <a:latin typeface="Calibri"/>
-              </a:rPr>
-              <a:t>Multi-OS boot menus,</a:t>
-            </a:r>
-          </a:p>
-          <a:p>
-            <a:pPr>
-              <a:spcAft>
-                <a:spcPts val="400"/>
-              </a:spcAft>
-            </a:pPr>
-            <a:r>
-              <a:rPr sz="1100" b="0" i="0">
-                <a:solidFill>
-                  <a:srgbClr val="333333"/>
-                </a:solidFill>
-                <a:latin typeface="Calibri"/>
-              </a:rPr>
-              <a:t>filesystem support,</a:t>
-            </a:r>
-          </a:p>
-          <a:p>
-            <a:pPr>
-              <a:spcAft>
-                <a:spcPts val="400"/>
-              </a:spcAft>
-            </a:pPr>
-            <a:r>
-              <a:rPr sz="1100" b="0" i="0">
+              <a:rPr sz="1400" b="0" i="0" dirty="0">
                 <a:solidFill>
                   <a:srgbClr val="333333"/>
                 </a:solidFill>
@@ -6249,8 +7192,8 @@
 </p:sld>
 </file>
 
-<file path=ppt/slides/slide11.xml><?xml version="1.0" encoding="utf-8"?>
-<p:sld xmlns:a="http://schemas.openxmlformats.org/drawingml/2006/main" xmlns:p="http://schemas.openxmlformats.org/presentationml/2006/main" xmlns:r="http://schemas.openxmlformats.org/officeDocument/2006/relationships">
+<file path=ppt/slides/slide5.xml><?xml version="1.0" encoding="utf-8"?>
+<p:sld xmlns:a="http://schemas.openxmlformats.org/drawingml/2006/main" xmlns:r="http://schemas.openxmlformats.org/officeDocument/2006/relationships" xmlns:p="http://schemas.openxmlformats.org/presentationml/2006/main">
   <p:cSld>
     <p:spTree>
       <p:nvGrpSpPr>
@@ -6258,7 +7201,14 @@
         <p:cNvGrpSpPr/>
         <p:nvPr/>
       </p:nvGrpSpPr>
-      <p:grpSpPr/>
+      <p:grpSpPr>
+        <a:xfrm>
+          <a:off x="0" y="0"/>
+          <a:ext cx="0" cy="0"/>
+          <a:chOff x="0" y="0"/>
+          <a:chExt cx="0" cy="0"/>
+        </a:xfrm>
+      </p:grpSpPr>
       <p:sp>
         <p:nvSpPr>
           <p:cNvPr id="2" name="Title 1"/>
@@ -6275,10 +7225,7 @@
           <a:lstStyle/>
           <a:p>
             <a:r>
-              <a:rPr sz="3200" b="1">
-                <a:solidFill>
-                  <a:srgbClr val="CC0066"/>
-                </a:solidFill>
+              <a:rPr sz="3200" b="1" dirty="0">
                 <a:latin typeface="Calibri"/>
               </a:rPr>
               <a:t>When to Use Which</a:t>
@@ -6303,7 +7250,7 @@
           <a:noFill/>
         </p:spPr>
         <p:txBody>
-          <a:bodyPr wrap="square" anchor="t" lIns="45720" rIns="45720">
+          <a:bodyPr wrap="square" lIns="45720" rIns="45720" anchor="t">
             <a:spAutoFit/>
           </a:bodyPr>
           <a:lstStyle/>
@@ -6364,6 +7311,7 @@
           <a:lstStyle/>
           <a:p>
             <a:pPr algn="ctr"/>
+            <a:endParaRPr/>
           </a:p>
         </p:txBody>
       </p:sp>
@@ -6384,7 +7332,7 @@
           <a:noFill/>
         </p:spPr>
         <p:txBody>
-          <a:bodyPr wrap="square" anchor="t" lIns="45720" rIns="45720">
+          <a:bodyPr wrap="square" lIns="45720" rIns="45720" anchor="t">
             <a:spAutoFit/>
           </a:bodyPr>
           <a:lstStyle/>
@@ -6411,7 +7359,7 @@
         <p:spPr>
           <a:xfrm>
             <a:off x="960120" y="2468880"/>
-            <a:ext cx="4937760" cy="3337560"/>
+            <a:ext cx="4937760" cy="1903085"/>
           </a:xfrm>
           <a:prstGeom prst="rect">
             <a:avLst/>
@@ -6430,7 +7378,7 @@
               </a:spcAft>
             </a:pPr>
             <a:r>
-              <a:rPr sz="1300" b="0" i="0">
+              <a:rPr sz="1600" b="0" i="0">
                 <a:solidFill>
                   <a:srgbClr val="333333"/>
                 </a:solidFill>
@@ -6446,7 +7394,7 @@
               </a:spcAft>
             </a:pPr>
             <a:r>
-              <a:rPr sz="1300" b="0" i="0">
+              <a:rPr sz="1600" b="0" i="0">
                 <a:solidFill>
                   <a:srgbClr val="333333"/>
                 </a:solidFill>
@@ -6462,7 +7410,7 @@
               </a:spcAft>
             </a:pPr>
             <a:r>
-              <a:rPr sz="1300" b="0" i="0">
+              <a:rPr sz="1600" b="0" i="0">
                 <a:solidFill>
                   <a:srgbClr val="333333"/>
                 </a:solidFill>
@@ -6478,7 +7426,7 @@
               </a:spcAft>
             </a:pPr>
             <a:r>
-              <a:rPr sz="1300" b="0" i="0">
+              <a:rPr sz="1600" b="0" i="0">
                 <a:solidFill>
                   <a:srgbClr val="333333"/>
                 </a:solidFill>
@@ -6494,7 +7442,7 @@
               </a:spcAft>
             </a:pPr>
             <a:r>
-              <a:rPr sz="1300" b="1" i="0">
+              <a:rPr sz="1600" b="1" i="0">
                 <a:solidFill>
                   <a:srgbClr val="CC0066"/>
                 </a:solidFill>
@@ -6510,7 +7458,7 @@
               </a:spcAft>
             </a:pPr>
             <a:r>
-              <a:rPr sz="1200" b="0" i="1">
+              <a:rPr sz="1600" b="0" i="1">
                 <a:solidFill>
                   <a:srgbClr val="333333"/>
                 </a:solidFill>
@@ -6564,6 +7512,7 @@
           <a:lstStyle/>
           <a:p>
             <a:pPr algn="ctr"/>
+            <a:endParaRPr/>
           </a:p>
         </p:txBody>
       </p:sp>
@@ -6584,7 +7533,7 @@
           <a:noFill/>
         </p:spPr>
         <p:txBody>
-          <a:bodyPr wrap="square" anchor="t" lIns="45720" rIns="45720">
+          <a:bodyPr wrap="square" lIns="45720" rIns="45720" anchor="t">
             <a:spAutoFit/>
           </a:bodyPr>
           <a:lstStyle/>
@@ -6611,7 +7560,7 @@
         <p:spPr>
           <a:xfrm>
             <a:off x="6400800" y="2468880"/>
-            <a:ext cx="4937760" cy="3337560"/>
+            <a:ext cx="4937760" cy="1903085"/>
           </a:xfrm>
           <a:prstGeom prst="rect">
             <a:avLst/>
@@ -6630,7 +7579,7 @@
               </a:spcAft>
             </a:pPr>
             <a:r>
-              <a:rPr sz="1300" b="0" i="0">
+              <a:rPr sz="1600" b="0" i="0">
                 <a:solidFill>
                   <a:srgbClr val="333333"/>
                 </a:solidFill>
@@ -6646,7 +7595,7 @@
               </a:spcAft>
             </a:pPr>
             <a:r>
-              <a:rPr sz="1300" b="0" i="0">
+              <a:rPr sz="1600" b="0" i="0">
                 <a:solidFill>
                   <a:srgbClr val="333333"/>
                 </a:solidFill>
@@ -6662,7 +7611,7 @@
               </a:spcAft>
             </a:pPr>
             <a:r>
-              <a:rPr sz="1300" b="0" i="0">
+              <a:rPr sz="1600" b="0" i="0">
                 <a:solidFill>
                   <a:srgbClr val="333333"/>
                 </a:solidFill>
@@ -6678,7 +7627,7 @@
               </a:spcAft>
             </a:pPr>
             <a:r>
-              <a:rPr sz="1300" b="0" i="0">
+              <a:rPr sz="1600" b="0" i="0">
                 <a:solidFill>
                   <a:srgbClr val="333333"/>
                 </a:solidFill>
@@ -6694,7 +7643,7 @@
               </a:spcAft>
             </a:pPr>
             <a:r>
-              <a:rPr sz="1300" b="1" i="0">
+              <a:rPr sz="1600" b="1" i="0">
                 <a:solidFill>
                   <a:srgbClr val="663399"/>
                 </a:solidFill>
@@ -6710,7 +7659,7 @@
               </a:spcAft>
             </a:pPr>
             <a:r>
-              <a:rPr sz="1200" b="0" i="1">
+              <a:rPr sz="1600" b="0" i="1">
                 <a:solidFill>
                   <a:srgbClr val="333333"/>
                 </a:solidFill>
@@ -6729,8 +7678,8 @@
 </p:sld>
 </file>
 
-<file path=ppt/slides/slide12.xml><?xml version="1.0" encoding="utf-8"?>
-<p:sld xmlns:a="http://schemas.openxmlformats.org/drawingml/2006/main" xmlns:p="http://schemas.openxmlformats.org/presentationml/2006/main" xmlns:r="http://schemas.openxmlformats.org/officeDocument/2006/relationships">
+<file path=ppt/slides/slide6.xml><?xml version="1.0" encoding="utf-8"?>
+<p:sld xmlns:a="http://schemas.openxmlformats.org/drawingml/2006/main" xmlns:r="http://schemas.openxmlformats.org/officeDocument/2006/relationships" xmlns:p="http://schemas.openxmlformats.org/presentationml/2006/main">
   <p:cSld>
     <p:spTree>
       <p:nvGrpSpPr>
@@ -6738,7 +7687,14 @@
         <p:cNvGrpSpPr/>
         <p:nvPr/>
       </p:nvGrpSpPr>
-      <p:grpSpPr/>
+      <p:grpSpPr>
+        <a:xfrm>
+          <a:off x="0" y="0"/>
+          <a:ext cx="0" cy="0"/>
+          <a:chOff x="0" y="0"/>
+          <a:chExt cx="0" cy="0"/>
+        </a:xfrm>
+      </p:grpSpPr>
       <p:sp>
         <p:nvSpPr>
           <p:cNvPr id="2" name="Title 1"/>
@@ -6755,13 +7711,16 @@
           <a:lstStyle/>
           <a:p>
             <a:r>
-              <a:rPr sz="3200" b="1">
-                <a:solidFill>
-                  <a:srgbClr val="CC0066"/>
-                </a:solidFill>
-                <a:latin typeface="Calibri"/>
-              </a:rPr>
-              <a:t>Yocto Bootloader Wiring</a:t>
+              <a:rPr sz="3200" b="1" dirty="0" err="1">
+                <a:latin typeface="Calibri"/>
+              </a:rPr>
+              <a:t>Yocto</a:t>
+            </a:r>
+            <a:r>
+              <a:rPr sz="3200" b="1" dirty="0">
+                <a:latin typeface="Calibri"/>
+              </a:rPr>
+              <a:t> Bootloader Wiring</a:t>
             </a:r>
           </a:p>
         </p:txBody>
@@ -6783,7 +7742,7 @@
           <a:noFill/>
         </p:spPr>
         <p:txBody>
-          <a:bodyPr wrap="square" anchor="t" lIns="45720" rIns="45720">
+          <a:bodyPr wrap="square" lIns="45720" rIns="45720" anchor="t">
             <a:spAutoFit/>
           </a:bodyPr>
           <a:lstStyle/>
@@ -6844,6 +7803,7 @@
           <a:lstStyle/>
           <a:p>
             <a:pPr algn="ctr"/>
+            <a:endParaRPr/>
           </a:p>
         </p:txBody>
       </p:sp>
@@ -6888,6 +7848,7 @@
           <a:lstStyle/>
           <a:p>
             <a:pPr algn="ctr"/>
+            <a:endParaRPr/>
           </a:p>
         </p:txBody>
       </p:sp>
@@ -6900,7 +7861,7 @@
         <p:spPr>
           <a:xfrm>
             <a:off x="1005840" y="1874519"/>
-            <a:ext cx="10241280" cy="4389120"/>
+            <a:ext cx="10241280" cy="3416320"/>
           </a:xfrm>
           <a:prstGeom prst="rect">
             <a:avLst/>
@@ -6919,14 +7880,47 @@
               </a:spcAft>
             </a:pPr>
             <a:r>
-              <a:rPr sz="1000" i="1">
+              <a:rPr sz="1200" i="1" dirty="0">
                 <a:solidFill>
                   <a:srgbClr val="808080"/>
                 </a:solidFill>
                 <a:latin typeface="Consolas"/>
               </a:rPr>
-              <a:t># In meta-yourbsp/conf/machine/yourboard.conf</a:t>
-            </a:r>
+              <a:t># In meta-</a:t>
+            </a:r>
+            <a:r>
+              <a:rPr sz="1200" i="1" dirty="0" err="1">
+                <a:solidFill>
+                  <a:srgbClr val="808080"/>
+                </a:solidFill>
+                <a:latin typeface="Consolas"/>
+              </a:rPr>
+              <a:t>yourbsp</a:t>
+            </a:r>
+            <a:r>
+              <a:rPr sz="1200" i="1" dirty="0">
+                <a:solidFill>
+                  <a:srgbClr val="808080"/>
+                </a:solidFill>
+                <a:latin typeface="Consolas"/>
+              </a:rPr>
+              <a:t>/conf/machine/</a:t>
+            </a:r>
+            <a:r>
+              <a:rPr sz="1200" i="1" dirty="0" err="1">
+                <a:solidFill>
+                  <a:srgbClr val="808080"/>
+                </a:solidFill>
+                <a:latin typeface="Consolas"/>
+              </a:rPr>
+              <a:t>yourboard.conf</a:t>
+            </a:r>
+            <a:endParaRPr sz="1200" i="1" dirty="0">
+              <a:solidFill>
+                <a:srgbClr val="808080"/>
+              </a:solidFill>
+              <a:latin typeface="Consolas"/>
+            </a:endParaRPr>
           </a:p>
           <a:p>
             <a:pPr>
@@ -6935,13 +7929,22 @@
               </a:spcAft>
             </a:pPr>
             <a:r>
-              <a:rPr sz="1000">
+              <a:rPr sz="1200" dirty="0" err="1">
                 <a:solidFill>
                   <a:srgbClr val="2D2D2D"/>
                 </a:solidFill>
                 <a:latin typeface="Consolas"/>
               </a:rPr>
-              <a:t>PREFERRED_PROVIDER_virtual/bootloader = "u-boot"</a:t>
+              <a:t>PREFERRED_PROVIDER_virtual</a:t>
+            </a:r>
+            <a:r>
+              <a:rPr sz="1200" dirty="0">
+                <a:solidFill>
+                  <a:srgbClr val="2D2D2D"/>
+                </a:solidFill>
+                <a:latin typeface="Consolas"/>
+              </a:rPr>
+              <a:t>/bootloader = "u-boot"</a:t>
             </a:r>
           </a:p>
           <a:p>
@@ -6951,13 +7954,31 @@
               </a:spcAft>
             </a:pPr>
             <a:r>
-              <a:rPr sz="1000">
+              <a:rPr sz="1200" dirty="0">
                 <a:solidFill>
                   <a:srgbClr val="2D2D2D"/>
                 </a:solidFill>
                 <a:latin typeface="Consolas"/>
               </a:rPr>
-              <a:t>UBOOT_MACHINE = "yourboard_defconfig"</a:t>
+              <a:t>UBOOT_MACHINE = "</a:t>
+            </a:r>
+            <a:r>
+              <a:rPr sz="1200" dirty="0" err="1">
+                <a:solidFill>
+                  <a:srgbClr val="2D2D2D"/>
+                </a:solidFill>
+                <a:latin typeface="Consolas"/>
+              </a:rPr>
+              <a:t>yourboard_defconfig</a:t>
+            </a:r>
+            <a:r>
+              <a:rPr sz="1200" dirty="0">
+                <a:solidFill>
+                  <a:srgbClr val="2D2D2D"/>
+                </a:solidFill>
+                <a:latin typeface="Consolas"/>
+              </a:rPr>
+              <a:t>"</a:t>
             </a:r>
           </a:p>
           <a:p>
@@ -6967,7 +7988,7 @@
               </a:spcAft>
             </a:pPr>
             <a:r>
-              <a:rPr sz="1000">
+              <a:rPr sz="1200" dirty="0">
                 <a:solidFill>
                   <a:srgbClr val="2D2D2D"/>
                 </a:solidFill>
@@ -6983,13 +8004,31 @@
               </a:spcAft>
             </a:pPr>
             <a:r>
-              <a:rPr sz="1000" i="1">
+              <a:rPr sz="1200" i="1" dirty="0">
                 <a:solidFill>
                   <a:srgbClr val="808080"/>
                 </a:solidFill>
                 <a:latin typeface="Consolas"/>
               </a:rPr>
-              <a:t># U-Boot recipe is provided by Yocto or the BSP</a:t>
+              <a:t># U-Boot recipe is provided by </a:t>
+            </a:r>
+            <a:r>
+              <a:rPr sz="1200" i="1" dirty="0" err="1">
+                <a:solidFill>
+                  <a:srgbClr val="808080"/>
+                </a:solidFill>
+                <a:latin typeface="Consolas"/>
+              </a:rPr>
+              <a:t>Yocto</a:t>
+            </a:r>
+            <a:r>
+              <a:rPr sz="1200" i="1" dirty="0">
+                <a:solidFill>
+                  <a:srgbClr val="808080"/>
+                </a:solidFill>
+                <a:latin typeface="Consolas"/>
+              </a:rPr>
+              <a:t> or the BSP</a:t>
             </a:r>
           </a:p>
           <a:p>
@@ -6999,13 +8038,31 @@
               </a:spcAft>
             </a:pPr>
             <a:r>
-              <a:rPr sz="1000" i="1">
+              <a:rPr sz="1200" i="1" dirty="0">
                 <a:solidFill>
                   <a:srgbClr val="808080"/>
                 </a:solidFill>
                 <a:latin typeface="Consolas"/>
               </a:rPr>
-              <a:t># bitbake u-boot</a:t>
+              <a:t># </a:t>
+            </a:r>
+            <a:r>
+              <a:rPr sz="1200" i="1" dirty="0" err="1">
+                <a:solidFill>
+                  <a:srgbClr val="808080"/>
+                </a:solidFill>
+                <a:latin typeface="Consolas"/>
+              </a:rPr>
+              <a:t>bitbake</a:t>
+            </a:r>
+            <a:r>
+              <a:rPr sz="1200" i="1" dirty="0">
+                <a:solidFill>
+                  <a:srgbClr val="808080"/>
+                </a:solidFill>
+                <a:latin typeface="Consolas"/>
+              </a:rPr>
+              <a:t> u-boot</a:t>
             </a:r>
           </a:p>
           <a:p>
@@ -7015,13 +8072,67 @@
               </a:spcAft>
             </a:pPr>
             <a:r>
-              <a:rPr sz="1000" i="1">
+              <a:rPr sz="1200" i="1" dirty="0">
                 <a:solidFill>
                   <a:srgbClr val="808080"/>
                 </a:solidFill>
                 <a:latin typeface="Consolas"/>
               </a:rPr>
-              <a:t># Output: tmp/deploy/images/${MACHINE}/u-boot.bin (or u-boot.imx, etc.)</a:t>
+              <a:t># Output: </a:t>
+            </a:r>
+            <a:r>
+              <a:rPr sz="1200" i="1" dirty="0" err="1">
+                <a:solidFill>
+                  <a:srgbClr val="808080"/>
+                </a:solidFill>
+                <a:latin typeface="Consolas"/>
+              </a:rPr>
+              <a:t>tmp</a:t>
+            </a:r>
+            <a:r>
+              <a:rPr sz="1200" i="1" dirty="0">
+                <a:solidFill>
+                  <a:srgbClr val="808080"/>
+                </a:solidFill>
+                <a:latin typeface="Consolas"/>
+              </a:rPr>
+              <a:t>/deploy/images/${MACHINE}/u-</a:t>
+            </a:r>
+            <a:r>
+              <a:rPr sz="1200" i="1" dirty="0" err="1">
+                <a:solidFill>
+                  <a:srgbClr val="808080"/>
+                </a:solidFill>
+                <a:latin typeface="Consolas"/>
+              </a:rPr>
+              <a:t>boot.bin</a:t>
+            </a:r>
+            <a:r>
+              <a:rPr sz="1200" i="1" dirty="0">
+                <a:solidFill>
+                  <a:srgbClr val="808080"/>
+                </a:solidFill>
+                <a:latin typeface="Consolas"/>
+              </a:rPr>
+              <a:t> (or u-</a:t>
+            </a:r>
+            <a:r>
+              <a:rPr sz="1200" i="1" dirty="0" err="1">
+                <a:solidFill>
+                  <a:srgbClr val="808080"/>
+                </a:solidFill>
+                <a:latin typeface="Consolas"/>
+              </a:rPr>
+              <a:t>boot.imx</a:t>
+            </a:r>
+            <a:r>
+              <a:rPr sz="1200" i="1" dirty="0">
+                <a:solidFill>
+                  <a:srgbClr val="808080"/>
+                </a:solidFill>
+                <a:latin typeface="Consolas"/>
+              </a:rPr>
+              <a:t>, etc.)</a:t>
             </a:r>
           </a:p>
           <a:p>
@@ -7031,7 +8142,7 @@
               </a:spcAft>
             </a:pPr>
             <a:r>
-              <a:rPr sz="1000">
+              <a:rPr sz="1200" dirty="0">
                 <a:solidFill>
                   <a:srgbClr val="2D2D2D"/>
                 </a:solidFill>
@@ -7047,14 +8158,47 @@
               </a:spcAft>
             </a:pPr>
             <a:r>
-              <a:rPr sz="1000" i="1">
+              <a:rPr sz="1200" i="1" dirty="0">
                 <a:solidFill>
                   <a:srgbClr val="808080"/>
                 </a:solidFill>
                 <a:latin typeface="Consolas"/>
               </a:rPr>
-              <a:t># Boot arguments passed to kernel — define in machine.conf</a:t>
-            </a:r>
+              <a:t># Boot arguments passed to kernel </a:t>
+            </a:r>
+            <a:r>
+              <a:rPr lang="en-IN" sz="1200" i="1" dirty="0">
+                <a:solidFill>
+                  <a:srgbClr val="808080"/>
+                </a:solidFill>
+                <a:latin typeface="Consolas"/>
+              </a:rPr>
+              <a:t>-</a:t>
+            </a:r>
+            <a:r>
+              <a:rPr sz="1200" i="1" dirty="0">
+                <a:solidFill>
+                  <a:srgbClr val="808080"/>
+                </a:solidFill>
+                <a:latin typeface="Consolas"/>
+              </a:rPr>
+              <a:t> define in </a:t>
+            </a:r>
+            <a:r>
+              <a:rPr sz="1200" i="1" dirty="0" err="1">
+                <a:solidFill>
+                  <a:srgbClr val="808080"/>
+                </a:solidFill>
+                <a:latin typeface="Consolas"/>
+              </a:rPr>
+              <a:t>machine.conf</a:t>
+            </a:r>
+            <a:endParaRPr sz="1200" i="1" dirty="0">
+              <a:solidFill>
+                <a:srgbClr val="808080"/>
+              </a:solidFill>
+              <a:latin typeface="Consolas"/>
+            </a:endParaRPr>
           </a:p>
           <a:p>
             <a:pPr>
@@ -7063,13 +8207,31 @@
               </a:spcAft>
             </a:pPr>
             <a:r>
-              <a:rPr sz="1000">
+              <a:rPr sz="1200" dirty="0">
                 <a:solidFill>
                   <a:srgbClr val="2D2D2D"/>
                 </a:solidFill>
                 <a:latin typeface="Consolas"/>
               </a:rPr>
-              <a:t>APPEND += "root=/dev/mmcblk0p2 rootwait console=ttyS0,115200"</a:t>
+              <a:t>APPEND += "root=/dev/mmcblk0p2 </a:t>
+            </a:r>
+            <a:r>
+              <a:rPr sz="1200" dirty="0" err="1">
+                <a:solidFill>
+                  <a:srgbClr val="2D2D2D"/>
+                </a:solidFill>
+                <a:latin typeface="Consolas"/>
+              </a:rPr>
+              <a:t>rootwait</a:t>
+            </a:r>
+            <a:r>
+              <a:rPr sz="1200" dirty="0">
+                <a:solidFill>
+                  <a:srgbClr val="2D2D2D"/>
+                </a:solidFill>
+                <a:latin typeface="Consolas"/>
+              </a:rPr>
+              <a:t> console=ttyS0,115200"</a:t>
             </a:r>
           </a:p>
           <a:p>
@@ -7079,7 +8241,7 @@
               </a:spcAft>
             </a:pPr>
             <a:r>
-              <a:rPr sz="1000">
+              <a:rPr sz="1200" dirty="0">
                 <a:solidFill>
                   <a:srgbClr val="2D2D2D"/>
                 </a:solidFill>
@@ -7095,13 +8257,49 @@
               </a:spcAft>
             </a:pPr>
             <a:r>
-              <a:rPr sz="1000" i="1">
+              <a:rPr sz="1200" i="1" dirty="0">
                 <a:solidFill>
                   <a:srgbClr val="808080"/>
                 </a:solidFill>
                 <a:latin typeface="Consolas"/>
               </a:rPr>
-              <a:t># WIC kickstart wires bootloader + kernel + rootfs into a flashable image</a:t>
+              <a:t># WIC kickstart wires bootloader + kernel + </a:t>
+            </a:r>
+            <a:r>
+              <a:rPr sz="1200" i="1" dirty="0" err="1">
+                <a:solidFill>
+                  <a:srgbClr val="808080"/>
+                </a:solidFill>
+                <a:latin typeface="Consolas"/>
+              </a:rPr>
+              <a:t>rootfs</a:t>
+            </a:r>
+            <a:r>
+              <a:rPr sz="1200" i="1" dirty="0">
+                <a:solidFill>
+                  <a:srgbClr val="808080"/>
+                </a:solidFill>
+                <a:latin typeface="Consolas"/>
+              </a:rPr>
+              <a:t> into a </a:t>
+            </a:r>
+            <a:r>
+              <a:rPr sz="1200" i="1" dirty="0" err="1">
+                <a:solidFill>
+                  <a:srgbClr val="808080"/>
+                </a:solidFill>
+                <a:latin typeface="Consolas"/>
+              </a:rPr>
+              <a:t>flashable</a:t>
+            </a:r>
+            <a:r>
+              <a:rPr sz="1200" i="1" dirty="0">
+                <a:solidFill>
+                  <a:srgbClr val="808080"/>
+                </a:solidFill>
+                <a:latin typeface="Consolas"/>
+              </a:rPr>
+              <a:t> image</a:t>
             </a:r>
           </a:p>
           <a:p>
@@ -7111,13 +8309,31 @@
               </a:spcAft>
             </a:pPr>
             <a:r>
-              <a:rPr sz="1000">
+              <a:rPr sz="1200" dirty="0">
                 <a:solidFill>
                   <a:srgbClr val="2D2D2D"/>
                 </a:solidFill>
                 <a:latin typeface="Consolas"/>
               </a:rPr>
-              <a:t>WKS_FILE = "yourboard.wks"</a:t>
+              <a:t>WKS_FILE = "</a:t>
+            </a:r>
+            <a:r>
+              <a:rPr sz="1200" dirty="0" err="1">
+                <a:solidFill>
+                  <a:srgbClr val="2D2D2D"/>
+                </a:solidFill>
+                <a:latin typeface="Consolas"/>
+              </a:rPr>
+              <a:t>yourboard.wks</a:t>
+            </a:r>
+            <a:r>
+              <a:rPr sz="1200" dirty="0">
+                <a:solidFill>
+                  <a:srgbClr val="2D2D2D"/>
+                </a:solidFill>
+                <a:latin typeface="Consolas"/>
+              </a:rPr>
+              <a:t>"</a:t>
             </a:r>
           </a:p>
           <a:p>
@@ -7127,7 +8343,7 @@
               </a:spcAft>
             </a:pPr>
             <a:r>
-              <a:rPr sz="1000">
+              <a:rPr sz="1200" dirty="0">
                 <a:solidFill>
                   <a:srgbClr val="2D2D2D"/>
                 </a:solidFill>
@@ -7143,13 +8359,31 @@
               </a:spcAft>
             </a:pPr>
             <a:r>
-              <a:rPr sz="1000" i="1">
+              <a:rPr sz="1200" i="1" dirty="0">
                 <a:solidFill>
                   <a:srgbClr val="808080"/>
                 </a:solidFill>
                 <a:latin typeface="Consolas"/>
               </a:rPr>
-              <a:t># yourboard.wks example:</a:t>
+              <a:t># </a:t>
+            </a:r>
+            <a:r>
+              <a:rPr sz="1200" i="1" dirty="0" err="1">
+                <a:solidFill>
+                  <a:srgbClr val="808080"/>
+                </a:solidFill>
+                <a:latin typeface="Consolas"/>
+              </a:rPr>
+              <a:t>yourboard.wks</a:t>
+            </a:r>
+            <a:r>
+              <a:rPr sz="1200" i="1" dirty="0">
+                <a:solidFill>
+                  <a:srgbClr val="808080"/>
+                </a:solidFill>
+                <a:latin typeface="Consolas"/>
+              </a:rPr>
+              <a:t> example:</a:t>
             </a:r>
           </a:p>
           <a:p>
@@ -7159,13 +8393,67 @@
               </a:spcAft>
             </a:pPr>
             <a:r>
-              <a:rPr sz="1000" i="1">
+              <a:rPr sz="1200" i="1" dirty="0">
                 <a:solidFill>
                   <a:srgbClr val="808080"/>
                 </a:solidFill>
                 <a:latin typeface="Consolas"/>
               </a:rPr>
-              <a:t>#   part u-boot --source rawcopy --sourceparams="file=u-boot.bin" --no-table</a:t>
+              <a:t>#   part u-boot --source </a:t>
+            </a:r>
+            <a:r>
+              <a:rPr sz="1200" i="1" dirty="0" err="1">
+                <a:solidFill>
+                  <a:srgbClr val="808080"/>
+                </a:solidFill>
+                <a:latin typeface="Consolas"/>
+              </a:rPr>
+              <a:t>rawcopy</a:t>
+            </a:r>
+            <a:r>
+              <a:rPr sz="1200" i="1" dirty="0">
+                <a:solidFill>
+                  <a:srgbClr val="808080"/>
+                </a:solidFill>
+                <a:latin typeface="Consolas"/>
+              </a:rPr>
+              <a:t> --</a:t>
+            </a:r>
+            <a:r>
+              <a:rPr sz="1200" i="1" dirty="0" err="1">
+                <a:solidFill>
+                  <a:srgbClr val="808080"/>
+                </a:solidFill>
+                <a:latin typeface="Consolas"/>
+              </a:rPr>
+              <a:t>sourceparams</a:t>
+            </a:r>
+            <a:r>
+              <a:rPr sz="1200" i="1" dirty="0">
+                <a:solidFill>
+                  <a:srgbClr val="808080"/>
+                </a:solidFill>
+                <a:latin typeface="Consolas"/>
+              </a:rPr>
+              <a:t>="file=u-</a:t>
+            </a:r>
+            <a:r>
+              <a:rPr sz="1200" i="1" dirty="0" err="1">
+                <a:solidFill>
+                  <a:srgbClr val="808080"/>
+                </a:solidFill>
+                <a:latin typeface="Consolas"/>
+              </a:rPr>
+              <a:t>boot.bin</a:t>
+            </a:r>
+            <a:r>
+              <a:rPr sz="1200" i="1" dirty="0">
+                <a:solidFill>
+                  <a:srgbClr val="808080"/>
+                </a:solidFill>
+                <a:latin typeface="Consolas"/>
+              </a:rPr>
+              <a:t>" --no-table</a:t>
             </a:r>
           </a:p>
           <a:p>
@@ -7175,14 +8463,65 @@
               </a:spcAft>
             </a:pPr>
             <a:r>
-              <a:rPr sz="1000" i="1">
+              <a:rPr sz="1200" i="1" dirty="0">
                 <a:solidFill>
                   <a:srgbClr val="808080"/>
                 </a:solidFill>
                 <a:latin typeface="Consolas"/>
               </a:rPr>
-              <a:t>#   part /boot --source bootimg-partition --align 4 --fixed-size 32M --fstype=vfat</a:t>
-            </a:r>
+              <a:t>#   part /boot --source </a:t>
+            </a:r>
+            <a:r>
+              <a:rPr sz="1200" i="1" dirty="0" err="1">
+                <a:solidFill>
+                  <a:srgbClr val="808080"/>
+                </a:solidFill>
+                <a:latin typeface="Consolas"/>
+              </a:rPr>
+              <a:t>bootimg</a:t>
+            </a:r>
+            <a:r>
+              <a:rPr sz="1200" i="1" dirty="0">
+                <a:solidFill>
+                  <a:srgbClr val="808080"/>
+                </a:solidFill>
+                <a:latin typeface="Consolas"/>
+              </a:rPr>
+              <a:t>-partition --align 4 --fixed-size 32M --</a:t>
+            </a:r>
+            <a:r>
+              <a:rPr sz="1200" i="1" dirty="0" err="1">
+                <a:solidFill>
+                  <a:srgbClr val="808080"/>
+                </a:solidFill>
+                <a:latin typeface="Consolas"/>
+              </a:rPr>
+              <a:t>fstype</a:t>
+            </a:r>
+            <a:r>
+              <a:rPr sz="1200" i="1" dirty="0">
+                <a:solidFill>
+                  <a:srgbClr val="808080"/>
+                </a:solidFill>
+                <a:latin typeface="Consolas"/>
+              </a:rPr>
+              <a:t>=</a:t>
+            </a:r>
+            <a:r>
+              <a:rPr sz="1200" i="1" dirty="0" err="1">
+                <a:solidFill>
+                  <a:srgbClr val="808080"/>
+                </a:solidFill>
+                <a:latin typeface="Consolas"/>
+              </a:rPr>
+              <a:t>vfat</a:t>
+            </a:r>
+            <a:endParaRPr sz="1200" i="1" dirty="0">
+              <a:solidFill>
+                <a:srgbClr val="808080"/>
+              </a:solidFill>
+              <a:latin typeface="Consolas"/>
+            </a:endParaRPr>
           </a:p>
           <a:p>
             <a:pPr>
@@ -7191,13 +8530,49 @@
               </a:spcAft>
             </a:pPr>
             <a:r>
-              <a:rPr sz="1000" i="1">
+              <a:rPr sz="1200" i="1" dirty="0">
                 <a:solidFill>
                   <a:srgbClr val="808080"/>
                 </a:solidFill>
                 <a:latin typeface="Consolas"/>
               </a:rPr>
-              <a:t>#   part /     --source rootfs --fstype=ext4 --align 4</a:t>
+              <a:t>#   part /     --source </a:t>
+            </a:r>
+            <a:r>
+              <a:rPr sz="1200" i="1" dirty="0" err="1">
+                <a:solidFill>
+                  <a:srgbClr val="808080"/>
+                </a:solidFill>
+                <a:latin typeface="Consolas"/>
+              </a:rPr>
+              <a:t>rootfs</a:t>
+            </a:r>
+            <a:r>
+              <a:rPr sz="1200" i="1" dirty="0">
+                <a:solidFill>
+                  <a:srgbClr val="808080"/>
+                </a:solidFill>
+                <a:latin typeface="Consolas"/>
+              </a:rPr>
+              <a:t> --</a:t>
+            </a:r>
+            <a:r>
+              <a:rPr sz="1200" i="1" dirty="0" err="1">
+                <a:solidFill>
+                  <a:srgbClr val="808080"/>
+                </a:solidFill>
+                <a:latin typeface="Consolas"/>
+              </a:rPr>
+              <a:t>fstype</a:t>
+            </a:r>
+            <a:r>
+              <a:rPr sz="1200" i="1" dirty="0">
+                <a:solidFill>
+                  <a:srgbClr val="808080"/>
+                </a:solidFill>
+                <a:latin typeface="Consolas"/>
+              </a:rPr>
+              <a:t>=ext4 --align 4</a:t>
             </a:r>
           </a:p>
         </p:txBody>
@@ -7210,8 +8585,8 @@
 </p:sld>
 </file>
 
-<file path=ppt/slides/slide13.xml><?xml version="1.0" encoding="utf-8"?>
-<p:sld xmlns:a="http://schemas.openxmlformats.org/drawingml/2006/main" xmlns:p="http://schemas.openxmlformats.org/presentationml/2006/main" xmlns:r="http://schemas.openxmlformats.org/officeDocument/2006/relationships">
+<file path=ppt/slides/slide7.xml><?xml version="1.0" encoding="utf-8"?>
+<p:sld xmlns:a="http://schemas.openxmlformats.org/drawingml/2006/main" xmlns:r="http://schemas.openxmlformats.org/officeDocument/2006/relationships" xmlns:p="http://schemas.openxmlformats.org/presentationml/2006/main">
   <p:cSld>
     <p:spTree>
       <p:nvGrpSpPr>
@@ -7219,7 +8594,14 @@
         <p:cNvGrpSpPr/>
         <p:nvPr/>
       </p:nvGrpSpPr>
-      <p:grpSpPr/>
+      <p:grpSpPr>
+        <a:xfrm>
+          <a:off x="0" y="0"/>
+          <a:ext cx="0" cy="0"/>
+          <a:chOff x="0" y="0"/>
+          <a:chExt cx="0" cy="0"/>
+        </a:xfrm>
+      </p:grpSpPr>
       <p:sp>
         <p:nvSpPr>
           <p:cNvPr id="2" name="Title 1"/>
@@ -7236,10 +8618,7 @@
           <a:lstStyle/>
           <a:p>
             <a:r>
-              <a:rPr sz="3200" b="1">
-                <a:solidFill>
-                  <a:srgbClr val="CC0066"/>
-                </a:solidFill>
+              <a:rPr sz="3200" b="1" dirty="0">
                 <a:latin typeface="Calibri"/>
               </a:rPr>
               <a:t>Boot Arguments</a:t>
@@ -7264,7 +8643,7 @@
           <a:noFill/>
         </p:spPr>
         <p:txBody>
-          <a:bodyPr wrap="square" anchor="t" lIns="45720" rIns="45720">
+          <a:bodyPr wrap="square" lIns="45720" rIns="45720" anchor="t">
             <a:spAutoFit/>
           </a:bodyPr>
           <a:lstStyle/>
@@ -7325,6 +8704,7 @@
           <a:lstStyle/>
           <a:p>
             <a:pPr algn="ctr"/>
+            <a:endParaRPr/>
           </a:p>
         </p:txBody>
       </p:sp>
@@ -7369,6 +8749,7 @@
           <a:lstStyle/>
           <a:p>
             <a:pPr algn="ctr"/>
+            <a:endParaRPr/>
           </a:p>
         </p:txBody>
       </p:sp>
@@ -7381,7 +8762,7 @@
         <p:spPr>
           <a:xfrm>
             <a:off x="1005840" y="1874519"/>
-            <a:ext cx="10241280" cy="4389120"/>
+            <a:ext cx="10241280" cy="3970318"/>
           </a:xfrm>
           <a:prstGeom prst="rect">
             <a:avLst/>
@@ -7400,7 +8781,7 @@
               </a:spcAft>
             </a:pPr>
             <a:r>
-              <a:rPr sz="1100" i="1">
+              <a:rPr sz="1400" i="1">
                 <a:solidFill>
                   <a:srgbClr val="808080"/>
                 </a:solidFill>
@@ -7416,7 +8797,7 @@
               </a:spcAft>
             </a:pPr>
             <a:r>
-              <a:rPr sz="1100">
+              <a:rPr sz="1400">
                 <a:solidFill>
                   <a:srgbClr val="2D2D2D"/>
                 </a:solidFill>
@@ -7432,7 +8813,7 @@
               </a:spcAft>
             </a:pPr>
             <a:r>
-              <a:rPr sz="1100">
+              <a:rPr sz="1400">
                 <a:solidFill>
                   <a:srgbClr val="2D2D2D"/>
                 </a:solidFill>
@@ -7448,7 +8829,7 @@
               </a:spcAft>
             </a:pPr>
             <a:r>
-              <a:rPr sz="1100">
+              <a:rPr sz="1400">
                 <a:solidFill>
                   <a:srgbClr val="2D2D2D"/>
                 </a:solidFill>
@@ -7464,7 +8845,7 @@
               </a:spcAft>
             </a:pPr>
             <a:r>
-              <a:rPr sz="1100">
+              <a:rPr sz="1400">
                 <a:solidFill>
                   <a:srgbClr val="2D2D2D"/>
                 </a:solidFill>
@@ -7480,7 +8861,7 @@
               </a:spcAft>
             </a:pPr>
             <a:r>
-              <a:rPr sz="1100">
+              <a:rPr sz="1400">
                 <a:solidFill>
                   <a:srgbClr val="2D2D2D"/>
                 </a:solidFill>
@@ -7496,7 +8877,7 @@
               </a:spcAft>
             </a:pPr>
             <a:r>
-              <a:rPr sz="1100">
+              <a:rPr sz="1400">
                 <a:solidFill>
                   <a:srgbClr val="2D2D2D"/>
                 </a:solidFill>
@@ -7512,7 +8893,7 @@
               </a:spcAft>
             </a:pPr>
             <a:r>
-              <a:rPr sz="1100">
+              <a:rPr sz="1400">
                 <a:solidFill>
                   <a:srgbClr val="2D2D2D"/>
                 </a:solidFill>
@@ -7528,7 +8909,7 @@
               </a:spcAft>
             </a:pPr>
             <a:r>
-              <a:rPr sz="1100">
+              <a:rPr sz="1400">
                 <a:solidFill>
                   <a:srgbClr val="2D2D2D"/>
                 </a:solidFill>
@@ -7544,7 +8925,7 @@
               </a:spcAft>
             </a:pPr>
             <a:r>
-              <a:rPr sz="1100">
+              <a:rPr sz="1400">
                 <a:solidFill>
                   <a:srgbClr val="2D2D2D"/>
                 </a:solidFill>
@@ -7560,7 +8941,7 @@
               </a:spcAft>
             </a:pPr>
             <a:r>
-              <a:rPr sz="1100">
+              <a:rPr sz="1400">
                 <a:solidFill>
                   <a:srgbClr val="2D2D2D"/>
                 </a:solidFill>
@@ -7576,7 +8957,7 @@
               </a:spcAft>
             </a:pPr>
             <a:r>
-              <a:rPr sz="1100" i="1">
+              <a:rPr sz="1400" i="1">
                 <a:solidFill>
                   <a:srgbClr val="808080"/>
                 </a:solidFill>
@@ -7592,7 +8973,7 @@
               </a:spcAft>
             </a:pPr>
             <a:r>
-              <a:rPr sz="1100">
+              <a:rPr sz="1400">
                 <a:solidFill>
                   <a:srgbClr val="2D2D2D"/>
                 </a:solidFill>
@@ -7608,7 +8989,7 @@
               </a:spcAft>
             </a:pPr>
             <a:r>
-              <a:rPr sz="1100">
+              <a:rPr sz="1400">
                 <a:solidFill>
                   <a:srgbClr val="2D2D2D"/>
                 </a:solidFill>
@@ -7624,7 +9005,7 @@
               </a:spcAft>
             </a:pPr>
             <a:r>
-              <a:rPr sz="1100">
+              <a:rPr sz="1400">
                 <a:solidFill>
                   <a:srgbClr val="2D2D2D"/>
                 </a:solidFill>
@@ -7640,7 +9021,7 @@
               </a:spcAft>
             </a:pPr>
             <a:r>
-              <a:rPr sz="1100">
+              <a:rPr sz="1400">
                 <a:solidFill>
                   <a:srgbClr val="2D2D2D"/>
                 </a:solidFill>
@@ -7656,7 +9037,7 @@
               </a:spcAft>
             </a:pPr>
             <a:r>
-              <a:rPr sz="1100" i="1">
+              <a:rPr sz="1400" i="1">
                 <a:solidFill>
                   <a:srgbClr val="808080"/>
                 </a:solidFill>
@@ -7672,7 +9053,7 @@
               </a:spcAft>
             </a:pPr>
             <a:r>
-              <a:rPr sz="1100">
+              <a:rPr sz="1400">
                 <a:solidFill>
                   <a:srgbClr val="2D2D2D"/>
                 </a:solidFill>
@@ -7691,8 +9072,8 @@
 </p:sld>
 </file>
 
-<file path=ppt/slides/slide14.xml><?xml version="1.0" encoding="utf-8"?>
-<p:sld xmlns:a="http://schemas.openxmlformats.org/drawingml/2006/main" xmlns:p="http://schemas.openxmlformats.org/presentationml/2006/main" xmlns:r="http://schemas.openxmlformats.org/officeDocument/2006/relationships">
+<file path=ppt/slides/slide8.xml><?xml version="1.0" encoding="utf-8"?>
+<p:sld xmlns:a="http://schemas.openxmlformats.org/drawingml/2006/main" xmlns:r="http://schemas.openxmlformats.org/officeDocument/2006/relationships" xmlns:p="http://schemas.openxmlformats.org/presentationml/2006/main">
   <p:cSld>
     <p:spTree>
       <p:nvGrpSpPr>
@@ -7700,7 +9081,14 @@
         <p:cNvGrpSpPr/>
         <p:nvPr/>
       </p:nvGrpSpPr>
-      <p:grpSpPr/>
+      <p:grpSpPr>
+        <a:xfrm>
+          <a:off x="0" y="0"/>
+          <a:ext cx="0" cy="0"/>
+          <a:chOff x="0" y="0"/>
+          <a:chExt cx="0" cy="0"/>
+        </a:xfrm>
+      </p:grpSpPr>
       <p:sp>
         <p:nvSpPr>
           <p:cNvPr id="2" name="Title 1"/>
@@ -7717,10 +9105,7 @@
           <a:lstStyle/>
           <a:p>
             <a:r>
-              <a:rPr sz="3200" b="1">
-                <a:solidFill>
-                  <a:srgbClr val="663399"/>
-                </a:solidFill>
+              <a:rPr sz="3200" b="1" dirty="0">
                 <a:latin typeface="Calibri"/>
               </a:rPr>
               <a:t>Session Summary</a:t>
@@ -7745,7 +9130,7 @@
           <a:noFill/>
         </p:spPr>
         <p:txBody>
-          <a:bodyPr wrap="square" anchor="t" lIns="45720" rIns="45720">
+          <a:bodyPr wrap="square" lIns="45720" rIns="45720" anchor="t">
             <a:spAutoFit/>
           </a:bodyPr>
           <a:lstStyle/>
@@ -7800,7 +9185,7 @@
           </a:fontRef>
         </p:style>
         <p:txBody>
-          <a:bodyPr rtlCol="0" anchor="ctr" lIns="0" rIns="0"/>
+          <a:bodyPr lIns="0" rIns="0" rtlCol="0" anchor="ctr"/>
           <a:lstStyle/>
           <a:p>
             <a:pPr algn="ctr"/>
@@ -7833,7 +9218,7 @@
           <a:noFill/>
         </p:spPr>
         <p:txBody>
-          <a:bodyPr wrap="square" anchor="t" lIns="45720" rIns="45720">
+          <a:bodyPr wrap="square" lIns="45720" rIns="45720" anchor="t">
             <a:spAutoFit/>
           </a:bodyPr>
           <a:lstStyle/>
@@ -7868,7 +9253,7 @@
           <a:noFill/>
         </p:spPr>
         <p:txBody>
-          <a:bodyPr wrap="square" anchor="t" lIns="45720" rIns="45720">
+          <a:bodyPr wrap="square" lIns="45720" rIns="45720" anchor="t">
             <a:spAutoFit/>
           </a:bodyPr>
           <a:lstStyle/>
@@ -7923,7 +9308,7 @@
           </a:fontRef>
         </p:style>
         <p:txBody>
-          <a:bodyPr rtlCol="0" anchor="ctr" lIns="0" rIns="0"/>
+          <a:bodyPr lIns="0" rIns="0" rtlCol="0" anchor="ctr"/>
           <a:lstStyle/>
           <a:p>
             <a:pPr algn="ctr"/>
@@ -7956,7 +9341,7 @@
           <a:noFill/>
         </p:spPr>
         <p:txBody>
-          <a:bodyPr wrap="square" anchor="t" lIns="45720" rIns="45720">
+          <a:bodyPr wrap="square" lIns="45720" rIns="45720" anchor="t">
             <a:spAutoFit/>
           </a:bodyPr>
           <a:lstStyle/>
@@ -7991,7 +9376,7 @@
           <a:noFill/>
         </p:spPr>
         <p:txBody>
-          <a:bodyPr wrap="square" anchor="t" lIns="45720" rIns="45720">
+          <a:bodyPr wrap="square" lIns="45720" rIns="45720" anchor="t">
             <a:spAutoFit/>
           </a:bodyPr>
           <a:lstStyle/>
@@ -8046,7 +9431,7 @@
           </a:fontRef>
         </p:style>
         <p:txBody>
-          <a:bodyPr rtlCol="0" anchor="ctr" lIns="0" rIns="0"/>
+          <a:bodyPr lIns="0" rIns="0" rtlCol="0" anchor="ctr"/>
           <a:lstStyle/>
           <a:p>
             <a:pPr algn="ctr"/>
@@ -8079,7 +9464,7 @@
           <a:noFill/>
         </p:spPr>
         <p:txBody>
-          <a:bodyPr wrap="square" anchor="t" lIns="45720" rIns="45720">
+          <a:bodyPr wrap="square" lIns="45720" rIns="45720" anchor="t">
             <a:spAutoFit/>
           </a:bodyPr>
           <a:lstStyle/>
@@ -8114,7 +9499,7 @@
           <a:noFill/>
         </p:spPr>
         <p:txBody>
-          <a:bodyPr wrap="square" anchor="t" lIns="45720" rIns="45720">
+          <a:bodyPr wrap="square" lIns="45720" rIns="45720" anchor="t">
             <a:spAutoFit/>
           </a:bodyPr>
           <a:lstStyle/>
@@ -8169,7 +9554,7 @@
           </a:fontRef>
         </p:style>
         <p:txBody>
-          <a:bodyPr rtlCol="0" anchor="ctr" lIns="0" rIns="0"/>
+          <a:bodyPr lIns="0" rIns="0" rtlCol="0" anchor="ctr"/>
           <a:lstStyle/>
           <a:p>
             <a:pPr algn="ctr"/>
@@ -8202,7 +9587,7 @@
           <a:noFill/>
         </p:spPr>
         <p:txBody>
-          <a:bodyPr wrap="square" anchor="t" lIns="45720" rIns="45720">
+          <a:bodyPr wrap="square" lIns="45720" rIns="45720" anchor="t">
             <a:spAutoFit/>
           </a:bodyPr>
           <a:lstStyle/>
@@ -8237,7 +9622,7 @@
           <a:noFill/>
         </p:spPr>
         <p:txBody>
-          <a:bodyPr wrap="square" anchor="t" lIns="45720" rIns="45720">
+          <a:bodyPr wrap="square" lIns="45720" rIns="45720" anchor="t">
             <a:spAutoFit/>
           </a:bodyPr>
           <a:lstStyle/>
@@ -8292,7 +9677,7 @@
           </a:fontRef>
         </p:style>
         <p:txBody>
-          <a:bodyPr rtlCol="0" anchor="ctr" lIns="0" rIns="0"/>
+          <a:bodyPr lIns="0" rIns="0" rtlCol="0" anchor="ctr"/>
           <a:lstStyle/>
           <a:p>
             <a:pPr algn="ctr"/>
@@ -8325,7 +9710,7 @@
           <a:noFill/>
         </p:spPr>
         <p:txBody>
-          <a:bodyPr wrap="square" anchor="t" lIns="45720" rIns="45720">
+          <a:bodyPr wrap="square" lIns="45720" rIns="45720" anchor="t">
             <a:spAutoFit/>
           </a:bodyPr>
           <a:lstStyle/>
@@ -8360,7 +9745,7 @@
           <a:noFill/>
         </p:spPr>
         <p:txBody>
-          <a:bodyPr wrap="square" anchor="t" lIns="45720" rIns="45720">
+          <a:bodyPr wrap="square" lIns="45720" rIns="45720" anchor="t">
             <a:spAutoFit/>
           </a:bodyPr>
           <a:lstStyle/>
@@ -8415,12 +9800,12 @@
           </a:fontRef>
         </p:style>
         <p:txBody>
-          <a:bodyPr rtlCol="0" anchor="ctr" lIns="228600"/>
+          <a:bodyPr lIns="228600" rtlCol="0" anchor="ctr"/>
           <a:lstStyle/>
           <a:p>
             <a:pPr algn="ctr"/>
             <a:r>
-              <a:rPr sz="1400" b="1">
+              <a:rPr sz="1400" b="1" dirty="0">
                 <a:solidFill>
                   <a:srgbClr val="663399"/>
                 </a:solidFill>
@@ -8429,909 +9814,31 @@
               <a:t>Next session  →  </a:t>
             </a:r>
             <a:r>
-              <a:rPr sz="1400">
+              <a:rPr sz="1400" dirty="0">
                 <a:solidFill>
                   <a:srgbClr val="333333"/>
                 </a:solidFill>
                 <a:latin typeface="Calibri"/>
               </a:rPr>
-              <a:t>Image Engineering (90 min) — WIC, partitions, filesystems</a:t>
-            </a:r>
-          </a:p>
-        </p:txBody>
-      </p:sp>
-    </p:spTree>
-  </p:cSld>
-  <p:clrMapOvr>
-    <a:masterClrMapping/>
-  </p:clrMapOvr>
-</p:sld>
-</file>
-
-<file path=ppt/slides/slide7.xml><?xml version="1.0" encoding="utf-8"?>
-<p:sld xmlns:a="http://schemas.openxmlformats.org/drawingml/2006/main" xmlns:p="http://schemas.openxmlformats.org/presentationml/2006/main" xmlns:r="http://schemas.openxmlformats.org/officeDocument/2006/relationships">
-  <p:cSld>
-    <p:spTree>
-      <p:nvGrpSpPr>
-        <p:cNvPr id="1" name=""/>
-        <p:cNvGrpSpPr/>
-        <p:nvPr/>
-      </p:nvGrpSpPr>
-      <p:grpSpPr/>
-      <p:sp>
-        <p:nvSpPr>
-          <p:cNvPr id="2" name="Title 1"/>
-          <p:cNvSpPr>
-            <a:spLocks noGrp="1"/>
-          </p:cNvSpPr>
-          <p:nvPr>
-            <p:ph type="ctrTitle"/>
-          </p:nvPr>
-        </p:nvSpPr>
-        <p:spPr/>
-        <p:txBody>
-          <a:bodyPr/>
-          <a:lstStyle/>
-          <a:p>
-            <a:r>
-              <a:rPr sz="4400" b="1">
-                <a:solidFill>
-                  <a:srgbClr val="FFFFFF"/>
-                </a:solidFill>
-                <a:latin typeface="Calibri"/>
-              </a:rPr>
-              <a:t>Bootloader Overview</a:t>
-            </a:r>
-          </a:p>
-        </p:txBody>
-      </p:sp>
-      <p:sp>
-        <p:nvSpPr>
-          <p:cNvPr id="3" name="Subtitle 2"/>
-          <p:cNvSpPr>
-            <a:spLocks noGrp="1"/>
-          </p:cNvSpPr>
-          <p:nvPr>
-            <p:ph type="subTitle" idx="1"/>
-          </p:nvPr>
-        </p:nvSpPr>
-        <p:spPr/>
-        <p:txBody>
-          <a:bodyPr/>
-          <a:lstStyle/>
-          <a:p>
-            <a:r>
-              <a:rPr sz="2200" i="1">
-                <a:solidFill>
-                  <a:srgbClr val="FFFFFF"/>
-                </a:solidFill>
-                <a:latin typeface="Calibri"/>
-              </a:rPr>
-              <a:t>Day 3 • Session 4 • 30 minutes</a:t>
-            </a:r>
-          </a:p>
-          <a:p>
-            <a:r>
-              <a:rPr sz="1800">
-                <a:solidFill>
-                  <a:srgbClr val="FFFFFF"/>
-                </a:solidFill>
-                <a:latin typeface="Calibri"/>
-              </a:rPr>
-              <a:t>U-Boot, EFI, GRUB — where kernel meets hardware</a:t>
-            </a:r>
-          </a:p>
-        </p:txBody>
-      </p:sp>
-    </p:spTree>
-  </p:cSld>
-  <p:clrMapOvr>
-    <a:masterClrMapping/>
-  </p:clrMapOvr>
-</p:sld>
-</file>
-
-<file path=ppt/slides/slide8.xml><?xml version="1.0" encoding="utf-8"?>
-<p:sld xmlns:a="http://schemas.openxmlformats.org/drawingml/2006/main" xmlns:p="http://schemas.openxmlformats.org/presentationml/2006/main" xmlns:r="http://schemas.openxmlformats.org/officeDocument/2006/relationships">
-  <p:cSld>
-    <p:spTree>
-      <p:nvGrpSpPr>
-        <p:cNvPr id="1" name=""/>
-        <p:cNvGrpSpPr/>
-        <p:nvPr/>
-      </p:nvGrpSpPr>
-      <p:grpSpPr/>
-      <p:sp>
-        <p:nvSpPr>
-          <p:cNvPr id="2" name="Title 1"/>
-          <p:cNvSpPr>
-            <a:spLocks noGrp="1"/>
-          </p:cNvSpPr>
-          <p:nvPr>
-            <p:ph type="title"/>
-          </p:nvPr>
-        </p:nvSpPr>
-        <p:spPr/>
-        <p:txBody>
-          <a:bodyPr/>
-          <a:lstStyle/>
-          <a:p>
-            <a:r>
-              <a:rPr sz="3200" b="1">
-                <a:solidFill>
-                  <a:srgbClr val="CC0066"/>
-                </a:solidFill>
-                <a:latin typeface="Calibri"/>
-              </a:rPr>
-              <a:t>Session Agenda</a:t>
-            </a:r>
-          </a:p>
-        </p:txBody>
-      </p:sp>
-      <p:sp>
-        <p:nvSpPr>
-          <p:cNvPr id="3" name="TextBox 2"/>
-          <p:cNvSpPr txBox="1"/>
-          <p:nvPr/>
-        </p:nvSpPr>
-        <p:spPr>
-          <a:xfrm>
-            <a:off x="822960" y="1463040"/>
-            <a:ext cx="10515600" cy="5029200"/>
-          </a:xfrm>
-          <a:prstGeom prst="rect">
-            <a:avLst/>
-          </a:prstGeom>
-          <a:noFill/>
-        </p:spPr>
-        <p:txBody>
-          <a:bodyPr wrap="square" lIns="45720" rIns="45720">
-            <a:spAutoFit/>
-          </a:bodyPr>
-          <a:lstStyle/>
-          <a:p>
-            <a:pPr>
-              <a:spcAft>
-                <a:spcPts val="600"/>
-              </a:spcAft>
-            </a:pPr>
-            <a:r>
-              <a:rPr sz="2000" b="0" i="0">
+              <a:t>Image Engineering </a:t>
+            </a:r>
+            <a:r>
+              <a:rPr lang="en-IN" sz="1400" dirty="0">
                 <a:solidFill>
                   <a:srgbClr val="333333"/>
                 </a:solidFill>
                 <a:latin typeface="Calibri"/>
               </a:rPr>
-              <a:t>1.  What a bootloader does</a:t>
-            </a:r>
-          </a:p>
-          <a:p>
-            <a:pPr>
-              <a:spcAft>
-                <a:spcPts val="600"/>
-              </a:spcAft>
-            </a:pPr>
-            <a:r>
-              <a:rPr sz="2000" b="0" i="0">
+              <a:t>- </a:t>
+            </a:r>
+            <a:r>
+              <a:rPr sz="1400" dirty="0">
                 <a:solidFill>
                   <a:srgbClr val="333333"/>
                 </a:solidFill>
                 <a:latin typeface="Calibri"/>
               </a:rPr>
-              <a:t>2.  Three families — U-Boot, EFI, GRUB</a:t>
-            </a:r>
-          </a:p>
-          <a:p>
-            <a:pPr>
-              <a:spcAft>
-                <a:spcPts val="600"/>
-              </a:spcAft>
-            </a:pPr>
-            <a:r>
-              <a:rPr sz="2000" b="0" i="0">
-                <a:solidFill>
-                  <a:srgbClr val="333333"/>
-                </a:solidFill>
-                <a:latin typeface="Calibri"/>
-              </a:rPr>
-              <a:t>3.  When to use which</a:t>
-            </a:r>
-          </a:p>
-          <a:p>
-            <a:pPr>
-              <a:spcAft>
-                <a:spcPts val="600"/>
-              </a:spcAft>
-            </a:pPr>
-            <a:r>
-              <a:rPr sz="2000" b="0" i="0">
-                <a:solidFill>
-                  <a:srgbClr val="333333"/>
-                </a:solidFill>
-                <a:latin typeface="Calibri"/>
-              </a:rPr>
-              <a:t>4.  How Yocto handles bootloader config</a:t>
-            </a:r>
-          </a:p>
-          <a:p>
-            <a:pPr>
-              <a:spcAft>
-                <a:spcPts val="600"/>
-              </a:spcAft>
-            </a:pPr>
-            <a:r>
-              <a:rPr sz="2000" b="0" i="0">
-                <a:solidFill>
-                  <a:srgbClr val="333333"/>
-                </a:solidFill>
-                <a:latin typeface="Calibri"/>
-              </a:rPr>
-              <a:t>5.  Boot arguments — passing info to the kernel</a:t>
-            </a:r>
-          </a:p>
-        </p:txBody>
-      </p:sp>
-    </p:spTree>
-  </p:cSld>
-  <p:clrMapOvr>
-    <a:masterClrMapping/>
-  </p:clrMapOvr>
-</p:sld>
-</file>
-
-<file path=ppt/slides/slide9.xml><?xml version="1.0" encoding="utf-8"?>
-<p:sld xmlns:a="http://schemas.openxmlformats.org/drawingml/2006/main" xmlns:p="http://schemas.openxmlformats.org/presentationml/2006/main" xmlns:r="http://schemas.openxmlformats.org/officeDocument/2006/relationships">
-  <p:cSld>
-    <p:spTree>
-      <p:nvGrpSpPr>
-        <p:cNvPr id="1" name=""/>
-        <p:cNvGrpSpPr/>
-        <p:nvPr/>
-      </p:nvGrpSpPr>
-      <p:grpSpPr/>
-      <p:sp>
-        <p:nvSpPr>
-          <p:cNvPr id="2" name="Title 1"/>
-          <p:cNvSpPr>
-            <a:spLocks noGrp="1"/>
-          </p:cNvSpPr>
-          <p:nvPr>
-            <p:ph type="title"/>
-          </p:nvPr>
-        </p:nvSpPr>
-        <p:spPr/>
-        <p:txBody>
-          <a:bodyPr/>
-          <a:lstStyle/>
-          <a:p>
-            <a:r>
-              <a:rPr sz="3200" b="1">
-                <a:solidFill>
-                  <a:srgbClr val="CC0066"/>
-                </a:solidFill>
-                <a:latin typeface="Calibri"/>
-              </a:rPr>
-              <a:t>What a Bootloader Does</a:t>
-            </a:r>
-          </a:p>
-        </p:txBody>
-      </p:sp>
-      <p:sp>
-        <p:nvSpPr>
-          <p:cNvPr id="3" name="TextBox 2"/>
-          <p:cNvSpPr txBox="1"/>
-          <p:nvPr/>
-        </p:nvSpPr>
-        <p:spPr>
-          <a:xfrm>
-            <a:off x="822960" y="1417320"/>
-            <a:ext cx="10515600" cy="365760"/>
-          </a:xfrm>
-          <a:prstGeom prst="rect">
-            <a:avLst/>
-          </a:prstGeom>
-          <a:noFill/>
-        </p:spPr>
-        <p:txBody>
-          <a:bodyPr wrap="square" anchor="t" lIns="45720" rIns="45720">
-            <a:spAutoFit/>
-          </a:bodyPr>
-          <a:lstStyle/>
-          <a:p>
-            <a:pPr algn="l"/>
-            <a:r>
-              <a:rPr sz="1500" b="0" i="1">
-                <a:solidFill>
-                  <a:srgbClr val="666666"/>
-                </a:solidFill>
-                <a:latin typeface="Calibri"/>
-              </a:rPr>
-              <a:t>The bridge from power-on to a running kernel.</a:t>
-            </a:r>
-          </a:p>
-        </p:txBody>
-      </p:sp>
-      <p:sp>
-        <p:nvSpPr>
-          <p:cNvPr id="4" name="Rounded Rectangle 3"/>
-          <p:cNvSpPr/>
-          <p:nvPr/>
-        </p:nvSpPr>
-        <p:spPr>
-          <a:xfrm>
-            <a:off x="379476" y="2103120"/>
-            <a:ext cx="2249424" cy="640080"/>
-          </a:xfrm>
-          <a:prstGeom prst="roundRect">
-            <a:avLst/>
-          </a:prstGeom>
-          <a:solidFill>
-            <a:srgbClr val="FCE4EC"/>
-          </a:solidFill>
-          <a:ln w="6350">
-            <a:solidFill>
-              <a:srgbClr val="CC0066"/>
-            </a:solidFill>
-          </a:ln>
-          <a:effectLst/>
-        </p:spPr>
-        <p:style>
-          <a:lnRef idx="1">
-            <a:schemeClr val="accent1"/>
-          </a:lnRef>
-          <a:fillRef idx="3">
-            <a:schemeClr val="accent1"/>
-          </a:fillRef>
-          <a:effectRef idx="2">
-            <a:schemeClr val="accent1"/>
-          </a:effectRef>
-          <a:fontRef idx="minor">
-            <a:schemeClr val="lt1"/>
-          </a:fontRef>
-        </p:style>
-        <p:txBody>
-          <a:bodyPr rtlCol="0" anchor="ctr" lIns="18288" rIns="18288"/>
-          <a:lstStyle/>
-          <a:p>
-            <a:pPr algn="ctr"/>
-            <a:r>
-              <a:rPr sz="1100" b="1">
-                <a:solidFill>
-                  <a:srgbClr val="663399"/>
-                </a:solidFill>
-                <a:latin typeface="Consolas"/>
-              </a:rPr>
-              <a:t>Power on</a:t>
-            </a:r>
-          </a:p>
-        </p:txBody>
-      </p:sp>
-      <p:sp>
-        <p:nvSpPr>
-          <p:cNvPr id="5" name="TextBox 4"/>
-          <p:cNvSpPr txBox="1"/>
-          <p:nvPr/>
-        </p:nvSpPr>
-        <p:spPr>
-          <a:xfrm>
-            <a:off x="379476" y="2788920"/>
-            <a:ext cx="2249424" cy="320040"/>
-          </a:xfrm>
-          <a:prstGeom prst="rect">
-            <a:avLst/>
-          </a:prstGeom>
-          <a:noFill/>
-        </p:spPr>
-        <p:txBody>
-          <a:bodyPr wrap="square" anchor="t" lIns="45720" rIns="45720">
-            <a:spAutoFit/>
-          </a:bodyPr>
-          <a:lstStyle/>
-          <a:p>
-            <a:pPr algn="ctr"/>
-            <a:r>
-              <a:rPr sz="900" b="0" i="0">
-                <a:solidFill>
-                  <a:srgbClr val="666666"/>
-                </a:solidFill>
-                <a:latin typeface="Calibri"/>
-              </a:rPr>
-              <a:t>Reset vector</a:t>
-            </a:r>
-          </a:p>
-        </p:txBody>
-      </p:sp>
-      <p:sp>
-        <p:nvSpPr>
-          <p:cNvPr id="6" name="Rounded Rectangle 5"/>
-          <p:cNvSpPr/>
-          <p:nvPr/>
-        </p:nvSpPr>
-        <p:spPr>
-          <a:xfrm>
-            <a:off x="2674620" y="2103120"/>
-            <a:ext cx="2249424" cy="640080"/>
-          </a:xfrm>
-          <a:prstGeom prst="roundRect">
-            <a:avLst/>
-          </a:prstGeom>
-          <a:solidFill>
-            <a:srgbClr val="FCE4EC"/>
-          </a:solidFill>
-          <a:ln w="6350">
-            <a:solidFill>
-              <a:srgbClr val="CC0066"/>
-            </a:solidFill>
-          </a:ln>
-          <a:effectLst/>
-        </p:spPr>
-        <p:style>
-          <a:lnRef idx="1">
-            <a:schemeClr val="accent1"/>
-          </a:lnRef>
-          <a:fillRef idx="3">
-            <a:schemeClr val="accent1"/>
-          </a:fillRef>
-          <a:effectRef idx="2">
-            <a:schemeClr val="accent1"/>
-          </a:effectRef>
-          <a:fontRef idx="minor">
-            <a:schemeClr val="lt1"/>
-          </a:fontRef>
-        </p:style>
-        <p:txBody>
-          <a:bodyPr rtlCol="0" anchor="ctr" lIns="18288" rIns="18288"/>
-          <a:lstStyle/>
-          <a:p>
-            <a:pPr algn="ctr"/>
-            <a:r>
-              <a:rPr sz="1100" b="1">
-                <a:solidFill>
-                  <a:srgbClr val="663399"/>
-                </a:solidFill>
-                <a:latin typeface="Consolas"/>
-              </a:rPr>
-              <a:t>ROM code</a:t>
-            </a:r>
-          </a:p>
-        </p:txBody>
-      </p:sp>
-      <p:sp>
-        <p:nvSpPr>
-          <p:cNvPr id="7" name="TextBox 6"/>
-          <p:cNvSpPr txBox="1"/>
-          <p:nvPr/>
-        </p:nvSpPr>
-        <p:spPr>
-          <a:xfrm>
-            <a:off x="2674620" y="2788920"/>
-            <a:ext cx="2249424" cy="320040"/>
-          </a:xfrm>
-          <a:prstGeom prst="rect">
-            <a:avLst/>
-          </a:prstGeom>
-          <a:noFill/>
-        </p:spPr>
-        <p:txBody>
-          <a:bodyPr wrap="square" anchor="t" lIns="45720" rIns="45720">
-            <a:spAutoFit/>
-          </a:bodyPr>
-          <a:lstStyle/>
-          <a:p>
-            <a:pPr algn="ctr"/>
-            <a:r>
-              <a:rPr sz="900" b="0" i="0">
-                <a:solidFill>
-                  <a:srgbClr val="666666"/>
-                </a:solidFill>
-                <a:latin typeface="Calibri"/>
-              </a:rPr>
-              <a:t>Vendor first-stage</a:t>
-            </a:r>
-          </a:p>
-        </p:txBody>
-      </p:sp>
-      <p:sp>
-        <p:nvSpPr>
-          <p:cNvPr id="8" name="Rounded Rectangle 7"/>
-          <p:cNvSpPr/>
-          <p:nvPr/>
-        </p:nvSpPr>
-        <p:spPr>
-          <a:xfrm>
-            <a:off x="4969764" y="2103120"/>
-            <a:ext cx="2249424" cy="640080"/>
-          </a:xfrm>
-          <a:prstGeom prst="roundRect">
-            <a:avLst/>
-          </a:prstGeom>
-          <a:solidFill>
-            <a:srgbClr val="E9D8F0"/>
-          </a:solidFill>
-          <a:ln w="6350">
-            <a:solidFill>
-              <a:srgbClr val="CC0066"/>
-            </a:solidFill>
-          </a:ln>
-          <a:effectLst/>
-        </p:spPr>
-        <p:style>
-          <a:lnRef idx="1">
-            <a:schemeClr val="accent1"/>
-          </a:lnRef>
-          <a:fillRef idx="3">
-            <a:schemeClr val="accent1"/>
-          </a:fillRef>
-          <a:effectRef idx="2">
-            <a:schemeClr val="accent1"/>
-          </a:effectRef>
-          <a:fontRef idx="minor">
-            <a:schemeClr val="lt1"/>
-          </a:fontRef>
-        </p:style>
-        <p:txBody>
-          <a:bodyPr rtlCol="0" anchor="ctr" lIns="18288" rIns="18288"/>
-          <a:lstStyle/>
-          <a:p>
-            <a:pPr algn="ctr"/>
-            <a:r>
-              <a:rPr sz="1100" b="1">
-                <a:solidFill>
-                  <a:srgbClr val="663399"/>
-                </a:solidFill>
-                <a:latin typeface="Consolas"/>
-              </a:rPr>
-              <a:t>SPL</a:t>
-            </a:r>
-          </a:p>
-        </p:txBody>
-      </p:sp>
-      <p:sp>
-        <p:nvSpPr>
-          <p:cNvPr id="9" name="TextBox 8"/>
-          <p:cNvSpPr txBox="1"/>
-          <p:nvPr/>
-        </p:nvSpPr>
-        <p:spPr>
-          <a:xfrm>
-            <a:off x="4969764" y="2788920"/>
-            <a:ext cx="2249424" cy="320040"/>
-          </a:xfrm>
-          <a:prstGeom prst="rect">
-            <a:avLst/>
-          </a:prstGeom>
-          <a:noFill/>
-        </p:spPr>
-        <p:txBody>
-          <a:bodyPr wrap="square" anchor="t" lIns="45720" rIns="45720">
-            <a:spAutoFit/>
-          </a:bodyPr>
-          <a:lstStyle/>
-          <a:p>
-            <a:pPr algn="ctr"/>
-            <a:r>
-              <a:rPr sz="900" b="0" i="0">
-                <a:solidFill>
-                  <a:srgbClr val="666666"/>
-                </a:solidFill>
-                <a:latin typeface="Calibri"/>
-              </a:rPr>
-              <a:t>Second-stage loader</a:t>
-            </a:r>
-          </a:p>
-        </p:txBody>
-      </p:sp>
-      <p:sp>
-        <p:nvSpPr>
-          <p:cNvPr id="10" name="Rounded Rectangle 9"/>
-          <p:cNvSpPr/>
-          <p:nvPr/>
-        </p:nvSpPr>
-        <p:spPr>
-          <a:xfrm>
-            <a:off x="7264907" y="2103120"/>
-            <a:ext cx="2249424" cy="640080"/>
-          </a:xfrm>
-          <a:prstGeom prst="roundRect">
-            <a:avLst/>
-          </a:prstGeom>
-          <a:solidFill>
-            <a:srgbClr val="E9D8F0"/>
-          </a:solidFill>
-          <a:ln w="6350">
-            <a:solidFill>
-              <a:srgbClr val="CC0066"/>
-            </a:solidFill>
-          </a:ln>
-          <a:effectLst/>
-        </p:spPr>
-        <p:style>
-          <a:lnRef idx="1">
-            <a:schemeClr val="accent1"/>
-          </a:lnRef>
-          <a:fillRef idx="3">
-            <a:schemeClr val="accent1"/>
-          </a:fillRef>
-          <a:effectRef idx="2">
-            <a:schemeClr val="accent1"/>
-          </a:effectRef>
-          <a:fontRef idx="minor">
-            <a:schemeClr val="lt1"/>
-          </a:fontRef>
-        </p:style>
-        <p:txBody>
-          <a:bodyPr rtlCol="0" anchor="ctr" lIns="18288" rIns="18288"/>
-          <a:lstStyle/>
-          <a:p>
-            <a:pPr algn="ctr"/>
-            <a:r>
-              <a:rPr sz="1100" b="1">
-                <a:solidFill>
-                  <a:srgbClr val="663399"/>
-                </a:solidFill>
-                <a:latin typeface="Consolas"/>
-              </a:rPr>
-              <a:t>U-Boot</a:t>
-            </a:r>
-          </a:p>
-        </p:txBody>
-      </p:sp>
-      <p:sp>
-        <p:nvSpPr>
-          <p:cNvPr id="11" name="TextBox 10"/>
-          <p:cNvSpPr txBox="1"/>
-          <p:nvPr/>
-        </p:nvSpPr>
-        <p:spPr>
-          <a:xfrm>
-            <a:off x="7264907" y="2788920"/>
-            <a:ext cx="2249424" cy="320040"/>
-          </a:xfrm>
-          <a:prstGeom prst="rect">
-            <a:avLst/>
-          </a:prstGeom>
-          <a:noFill/>
-        </p:spPr>
-        <p:txBody>
-          <a:bodyPr wrap="square" anchor="t" lIns="45720" rIns="45720">
-            <a:spAutoFit/>
-          </a:bodyPr>
-          <a:lstStyle/>
-          <a:p>
-            <a:pPr algn="ctr"/>
-            <a:r>
-              <a:rPr sz="900" b="0" i="0">
-                <a:solidFill>
-                  <a:srgbClr val="666666"/>
-                </a:solidFill>
-                <a:latin typeface="Calibri"/>
-              </a:rPr>
-              <a:t>Full bootloader</a:t>
-            </a:r>
-          </a:p>
-        </p:txBody>
-      </p:sp>
-      <p:sp>
-        <p:nvSpPr>
-          <p:cNvPr id="12" name="Rounded Rectangle 11"/>
-          <p:cNvSpPr/>
-          <p:nvPr/>
-        </p:nvSpPr>
-        <p:spPr>
-          <a:xfrm>
-            <a:off x="9560051" y="2103120"/>
-            <a:ext cx="2249424" cy="640080"/>
-          </a:xfrm>
-          <a:prstGeom prst="roundRect">
-            <a:avLst/>
-          </a:prstGeom>
-          <a:solidFill>
-            <a:srgbClr val="E9D8F0"/>
-          </a:solidFill>
-          <a:ln w="6350">
-            <a:solidFill>
-              <a:srgbClr val="CC0066"/>
-            </a:solidFill>
-          </a:ln>
-          <a:effectLst/>
-        </p:spPr>
-        <p:style>
-          <a:lnRef idx="1">
-            <a:schemeClr val="accent1"/>
-          </a:lnRef>
-          <a:fillRef idx="3">
-            <a:schemeClr val="accent1"/>
-          </a:fillRef>
-          <a:effectRef idx="2">
-            <a:schemeClr val="accent1"/>
-          </a:effectRef>
-          <a:fontRef idx="minor">
-            <a:schemeClr val="lt1"/>
-          </a:fontRef>
-        </p:style>
-        <p:txBody>
-          <a:bodyPr rtlCol="0" anchor="ctr" lIns="18288" rIns="18288"/>
-          <a:lstStyle/>
-          <a:p>
-            <a:pPr algn="ctr"/>
-            <a:r>
-              <a:rPr sz="1100" b="1">
-                <a:solidFill>
-                  <a:srgbClr val="663399"/>
-                </a:solidFill>
-                <a:latin typeface="Consolas"/>
-              </a:rPr>
-              <a:t>Kernel</a:t>
-            </a:r>
-          </a:p>
-        </p:txBody>
-      </p:sp>
-      <p:sp>
-        <p:nvSpPr>
-          <p:cNvPr id="13" name="TextBox 12"/>
-          <p:cNvSpPr txBox="1"/>
-          <p:nvPr/>
-        </p:nvSpPr>
-        <p:spPr>
-          <a:xfrm>
-            <a:off x="9560051" y="2788920"/>
-            <a:ext cx="2249424" cy="320040"/>
-          </a:xfrm>
-          <a:prstGeom prst="rect">
-            <a:avLst/>
-          </a:prstGeom>
-          <a:noFill/>
-        </p:spPr>
-        <p:txBody>
-          <a:bodyPr wrap="square" anchor="t" lIns="45720" rIns="45720">
-            <a:spAutoFit/>
-          </a:bodyPr>
-          <a:lstStyle/>
-          <a:p>
-            <a:pPr algn="ctr"/>
-            <a:r>
-              <a:rPr sz="900" b="0" i="0">
-                <a:solidFill>
-                  <a:srgbClr val="666666"/>
-                </a:solidFill>
-                <a:latin typeface="Calibri"/>
-              </a:rPr>
-              <a:t>Linux takes over</a:t>
-            </a:r>
-          </a:p>
-        </p:txBody>
-      </p:sp>
-      <p:sp>
-        <p:nvSpPr>
-          <p:cNvPr id="14" name="TextBox 13"/>
-          <p:cNvSpPr txBox="1"/>
-          <p:nvPr/>
-        </p:nvSpPr>
-        <p:spPr>
-          <a:xfrm>
-            <a:off x="822960" y="3657600"/>
-            <a:ext cx="10515600" cy="2286000"/>
-          </a:xfrm>
-          <a:prstGeom prst="rect">
-            <a:avLst/>
-          </a:prstGeom>
-          <a:noFill/>
-        </p:spPr>
-        <p:txBody>
-          <a:bodyPr wrap="square" lIns="45720" rIns="45720">
-            <a:spAutoFit/>
-          </a:bodyPr>
-          <a:lstStyle/>
-          <a:p>
-            <a:pPr>
-              <a:spcAft>
-                <a:spcPts val="600"/>
-              </a:spcAft>
-            </a:pPr>
-            <a:r>
-              <a:rPr sz="1600" b="1" i="0">
-                <a:solidFill>
-                  <a:srgbClr val="CC0066"/>
-                </a:solidFill>
-                <a:latin typeface="Calibri"/>
-              </a:rPr>
-              <a:t>What the bootloader actually does</a:t>
-            </a:r>
-          </a:p>
-          <a:p>
-            <a:pPr>
-              <a:spcAft>
-                <a:spcPts val="400"/>
-              </a:spcAft>
-            </a:pPr>
-            <a:r>
-              <a:rPr sz="1300" b="0" i="0">
-                <a:solidFill>
-                  <a:srgbClr val="333333"/>
-                </a:solidFill>
-                <a:latin typeface="Calibri"/>
-              </a:rPr>
-              <a:t>• Init DRAM, clocks, basic peripherals</a:t>
-            </a:r>
-          </a:p>
-          <a:p>
-            <a:pPr>
-              <a:spcAft>
-                <a:spcPts val="400"/>
-              </a:spcAft>
-            </a:pPr>
-            <a:r>
-              <a:rPr sz="1300" b="0" i="0">
-                <a:solidFill>
-                  <a:srgbClr val="333333"/>
-                </a:solidFill>
-                <a:latin typeface="Calibri"/>
-              </a:rPr>
-              <a:t>• Load the kernel image into RAM from flash/SD/eMMC/network</a:t>
-            </a:r>
-          </a:p>
-          <a:p>
-            <a:pPr>
-              <a:spcAft>
-                <a:spcPts val="400"/>
-              </a:spcAft>
-            </a:pPr>
-            <a:r>
-              <a:rPr sz="1300" b="0" i="0">
-                <a:solidFill>
-                  <a:srgbClr val="333333"/>
-                </a:solidFill>
-                <a:latin typeface="Calibri"/>
-              </a:rPr>
-              <a:t>• Load the device tree blob (DTB)</a:t>
-            </a:r>
-          </a:p>
-          <a:p>
-            <a:pPr>
-              <a:spcAft>
-                <a:spcPts val="400"/>
-              </a:spcAft>
-            </a:pPr>
-            <a:r>
-              <a:rPr sz="1300" b="0" i="0">
-                <a:solidFill>
-                  <a:srgbClr val="333333"/>
-                </a:solidFill>
-                <a:latin typeface="Calibri"/>
-              </a:rPr>
-              <a:t>• Pass boot arguments to the kernel</a:t>
-            </a:r>
-          </a:p>
-          <a:p>
-            <a:pPr>
-              <a:spcAft>
-                <a:spcPts val="800"/>
-              </a:spcAft>
-            </a:pPr>
-            <a:r>
-              <a:rPr sz="1300" b="0" i="0">
-                <a:solidFill>
-                  <a:srgbClr val="333333"/>
-                </a:solidFill>
-                <a:latin typeface="Calibri"/>
-              </a:rPr>
-              <a:t>• Jump to the kernel entry point</a:t>
-            </a:r>
-          </a:p>
-          <a:p>
-            <a:pPr>
-              <a:spcAft>
-                <a:spcPts val="400"/>
-              </a:spcAft>
-            </a:pPr>
-            <a:r>
-              <a:rPr sz="1300" b="0" i="1">
-                <a:solidFill>
-                  <a:srgbClr val="333333"/>
-                </a:solidFill>
-                <a:latin typeface="Calibri"/>
-              </a:rPr>
-              <a:t>From there, the kernel runs init, mounts the rootfs, starts systemd, and you have a system.</a:t>
+              <a:t>WIC, partitions, filesystems</a:t>
             </a:r>
           </a:p>
         </p:txBody>
